--- a/assets/figures-editable/c3-c4/c3-e24.pptx
+++ b/assets/figures-editable/c3-c4/c3-e24.pptx
@@ -3104,8 +3104,8 @@
         </p:nvSpPr>
         <p:spPr>
           <a:xfrm>
-            <a:off x="274320" y="137160"/>
-            <a:ext cx="11612880" cy="365760"/>
+            <a:off x="274320" y="118872"/>
+            <a:ext cx="11612880" cy="340105"/>
           </a:xfrm>
           <a:prstGeom prst="rect">
             <a:avLst/>
@@ -3114,7 +3114,7 @@
           <a:effectLst/>
         </p:spPr>
         <p:txBody>
-          <a:bodyPr wrap="square" lIns="27432" rIns="27432" tIns="18288" bIns="18288" anchor="ctr">
+          <a:bodyPr wrap="none" lIns="18288" rIns="18288" tIns="18288" bIns="18288" anchor="t">
             <a:spAutoFit/>
           </a:bodyPr>
           <a:lstStyle/>
@@ -3125,7 +3125,7 @@
               </a:spcAft>
             </a:pPr>
             <a:r>
-              <a:rPr sz="2100" b="0" i="0">
+              <a:rPr sz="1900" b="1" i="0">
                 <a:solidFill>
                   <a:srgbClr val="8EDBD4"/>
                 </a:solidFill>
@@ -3136,23 +3136,20 @@
           </a:p>
         </p:txBody>
       </p:sp>
-      <p:sp>
-        <p:nvSpPr>
-          <p:cNvPr id="3" name="C3-E24 rect 1" descr="sci-ppt:o001"/>
-          <p:cNvSpPr/>
+      <p:cxnSp>
+        <p:nvCxnSpPr>
+          <p:cNvPr id="3" name="C3-E24 line 1" descr="sci-ppt:o001"/>
+          <p:cNvCxnSpPr/>
           <p:nvPr/>
-        </p:nvSpPr>
-        <p:spPr>
-          <a:xfrm>
-            <a:off x="731520" y="1508760"/>
-            <a:ext cx="4937760" cy="731520"/>
-          </a:xfrm>
-          <a:prstGeom prst="rect">
+        </p:nvCxnSpPr>
+        <p:spPr>
+          <a:xfrm>
+            <a:off x="914400" y="5029200"/>
+            <a:ext cx="6035040" cy="0"/>
+          </a:xfrm>
+          <a:prstGeom prst="line">
             <a:avLst/>
           </a:prstGeom>
-          <a:solidFill>
-            <a:srgbClr val="213E4B"/>
-          </a:solidFill>
           <a:ln w="19050">
             <a:solidFill>
               <a:srgbClr val="B4C7D2"/>
@@ -3160,78 +3157,51 @@
           </a:ln>
           <a:effectLst/>
         </p:spPr>
-        <p:txBody>
-          <a:bodyPr rtlCol="0" anchor="ctr"/>
-          <a:lstStyle/>
-          <a:p>
-            <a:pPr algn="ctr"/>
-          </a:p>
-        </p:txBody>
-      </p:sp>
+      </p:cxnSp>
       <p:cxnSp>
         <p:nvCxnSpPr>
-          <p:cNvPr id="4" name="C3-E24 arrow 2" descr="sci-ppt:o002"/>
+          <p:cNvPr id="4" name="C3-E24 line 2" descr="sci-ppt:o002"/>
           <p:cNvCxnSpPr/>
           <p:nvPr/>
         </p:nvCxnSpPr>
         <p:spPr>
           <a:xfrm>
-            <a:off x="1005840" y="1874519"/>
-            <a:ext cx="4297680" cy="0"/>
+            <a:off x="914400" y="1371600"/>
+            <a:ext cx="0" cy="3657600"/>
           </a:xfrm>
           <a:prstGeom prst="line">
             <a:avLst/>
           </a:prstGeom>
-          <a:ln w="25400">
+          <a:ln w="19050">
             <a:solidFill>
-              <a:srgbClr val="8EDBD4"/>
+              <a:srgbClr val="B4C7D2"/>
             </a:solidFill>
-            <a:headEnd type="none" w="med" len="med"/>
-            <a:tailEnd type="triangle" w="med" len="med"/>
           </a:ln>
           <a:effectLst/>
         </p:spPr>
       </p:cxnSp>
-      <p:sp>
-        <p:nvSpPr>
-          <p:cNvPr id="5" name="C3-E24 text 3" descr="sci-ppt:o003"/>
-          <p:cNvSpPr txBox="1"/>
+      <p:cxnSp>
+        <p:nvCxnSpPr>
+          <p:cNvPr id="5" name="C3-E24 line 3" descr="sci-ppt:o003"/>
+          <p:cNvCxnSpPr/>
           <p:nvPr/>
-        </p:nvSpPr>
-        <p:spPr>
-          <a:xfrm>
-            <a:off x="1463040" y="1051560"/>
-            <a:ext cx="3931920" cy="365760"/>
-          </a:xfrm>
-          <a:prstGeom prst="rect">
+        </p:nvCxnSpPr>
+        <p:spPr>
+          <a:xfrm>
+            <a:off x="914400" y="5029200"/>
+            <a:ext cx="0" cy="64008"/>
+          </a:xfrm>
+          <a:prstGeom prst="line">
             <a:avLst/>
           </a:prstGeom>
-          <a:noFill/>
+          <a:ln w="12700">
+            <a:solidFill>
+              <a:srgbClr val="B4C7D2"/>
+            </a:solidFill>
+          </a:ln>
           <a:effectLst/>
         </p:spPr>
-        <p:txBody>
-          <a:bodyPr wrap="square" lIns="27432" rIns="27432" tIns="18288" bIns="18288" anchor="ctr">
-            <a:spAutoFit/>
-          </a:bodyPr>
-          <a:lstStyle/>
-          <a:p>
-            <a:pPr algn="l">
-              <a:spcAft>
-                <a:spcPts val="0"/>
-              </a:spcAft>
-            </a:pPr>
-            <a:r>
-              <a:rPr sz="1800" b="0" i="0">
-                <a:solidFill>
-                  <a:srgbClr val="E7F0F3"/>
-                </a:solidFill>
-                <a:latin typeface="Arial"/>
-              </a:rPr>
-              <a:t>Finite emitted liquid: m_j, E_j, U_j</a:t>
-            </a:r>
-          </a:p>
-        </p:txBody>
-      </p:sp>
+      </p:cxnSp>
       <p:cxnSp>
         <p:nvCxnSpPr>
           <p:cNvPr id="6" name="C3-E24 line 4" descr="sci-ppt:o004"/>
@@ -3240,15 +3210,15 @@
         </p:nvCxnSpPr>
         <p:spPr>
           <a:xfrm>
-            <a:off x="731520" y="2606040"/>
-            <a:ext cx="4937760" cy="0"/>
+            <a:off x="914400" y="1371600"/>
+            <a:ext cx="0" cy="3657600"/>
           </a:xfrm>
           <a:prstGeom prst="line">
             <a:avLst/>
           </a:prstGeom>
-          <a:ln w="25400">
+          <a:ln w="7620">
             <a:solidFill>
-              <a:srgbClr val="8EDBD4"/>
+              <a:srgbClr val="2E4756"/>
             </a:solidFill>
           </a:ln>
           <a:effectLst/>
@@ -3262,8 +3232,8 @@
         </p:nvSpPr>
         <p:spPr>
           <a:xfrm>
-            <a:off x="2743200" y="2697480"/>
-            <a:ext cx="1828800" cy="365760"/>
+            <a:off x="457200" y="5111496"/>
+            <a:ext cx="914400" cy="208407"/>
           </a:xfrm>
           <a:prstGeom prst="rect">
             <a:avLst/>
@@ -3272,24 +3242,24 @@
           <a:effectLst/>
         </p:spPr>
         <p:txBody>
-          <a:bodyPr wrap="square" lIns="27432" rIns="27432" tIns="18288" bIns="18288" anchor="ctr">
+          <a:bodyPr wrap="none" lIns="18288" rIns="18288" tIns="18288" bIns="18288" anchor="t">
             <a:spAutoFit/>
           </a:bodyPr>
           <a:lstStyle/>
           <a:p>
-            <a:pPr algn="l">
+            <a:pPr algn="ctr">
               <a:spcAft>
                 <a:spcPts val="0"/>
               </a:spcAft>
             </a:pPr>
             <a:r>
-              <a:rPr sz="1700" b="0" i="0">
+              <a:rPr sz="1050" b="0" i="0">
                 <a:solidFill>
-                  <a:srgbClr val="E7F0F3"/>
+                  <a:srgbClr val="B4C7D2"/>
                 </a:solidFill>
                 <a:latin typeface="Arial"/>
               </a:rPr>
-              <a:t>L_j</a:t>
+              <a:t>0.01</a:t>
             </a:r>
           </a:p>
         </p:txBody>
@@ -3302,30 +3272,52 @@
         </p:nvCxnSpPr>
         <p:spPr>
           <a:xfrm>
-            <a:off x="457200" y="1508760"/>
-            <a:ext cx="0" cy="731520"/>
+            <a:off x="2423160" y="5029200"/>
+            <a:ext cx="0" cy="64008"/>
           </a:xfrm>
           <a:prstGeom prst="line">
             <a:avLst/>
           </a:prstGeom>
-          <a:ln w="25400">
+          <a:ln w="12700">
             <a:solidFill>
-              <a:srgbClr val="8EDBD4"/>
+              <a:srgbClr val="B4C7D2"/>
             </a:solidFill>
           </a:ln>
           <a:effectLst/>
         </p:spPr>
       </p:cxnSp>
-      <p:sp>
-        <p:nvSpPr>
-          <p:cNvPr id="9" name="C3-E24 text 7" descr="sci-ppt:o007"/>
+      <p:cxnSp>
+        <p:nvCxnSpPr>
+          <p:cNvPr id="9" name="C3-E24 line 7" descr="sci-ppt:o007"/>
+          <p:cNvCxnSpPr/>
+          <p:nvPr/>
+        </p:nvCxnSpPr>
+        <p:spPr>
+          <a:xfrm>
+            <a:off x="2423160" y="1371600"/>
+            <a:ext cx="0" cy="3657600"/>
+          </a:xfrm>
+          <a:prstGeom prst="line">
+            <a:avLst/>
+          </a:prstGeom>
+          <a:ln w="7620">
+            <a:solidFill>
+              <a:srgbClr val="2E4756"/>
+            </a:solidFill>
+          </a:ln>
+          <a:effectLst/>
+        </p:spPr>
+      </p:cxnSp>
+      <p:sp>
+        <p:nvSpPr>
+          <p:cNvPr id="10" name="C3-E24 text 8" descr="sci-ppt:o008"/>
           <p:cNvSpPr txBox="1"/>
           <p:nvPr/>
         </p:nvSpPr>
         <p:spPr>
           <a:xfrm>
-            <a:off x="137160" y="2377440"/>
-            <a:ext cx="1645920" cy="320040"/>
+            <a:off x="1965960" y="5111496"/>
+            <a:ext cx="914400" cy="208407"/>
           </a:xfrm>
           <a:prstGeom prst="rect">
             <a:avLst/>
@@ -3334,142 +3326,82 @@
           <a:effectLst/>
         </p:spPr>
         <p:txBody>
-          <a:bodyPr wrap="square" lIns="27432" rIns="27432" tIns="18288" bIns="18288" anchor="ctr">
+          <a:bodyPr wrap="none" lIns="18288" rIns="18288" tIns="18288" bIns="18288" anchor="t">
             <a:spAutoFit/>
           </a:bodyPr>
           <a:lstStyle/>
           <a:p>
-            <a:pPr algn="l">
+            <a:pPr algn="ctr">
               <a:spcAft>
                 <a:spcPts val="0"/>
               </a:spcAft>
             </a:pPr>
             <a:r>
-              <a:rPr sz="1400" b="0" i="0">
+              <a:rPr sz="1050" b="0" i="0">
                 <a:solidFill>
-                  <a:srgbClr val="E7F0F3"/>
+                  <a:srgbClr val="B4C7D2"/>
                 </a:solidFill>
                 <a:latin typeface="Arial"/>
               </a:rPr>
-              <a:t>d_j = 2a_j</a:t>
+              <a:t>0.1</a:t>
             </a:r>
           </a:p>
         </p:txBody>
       </p:sp>
       <p:cxnSp>
         <p:nvCxnSpPr>
-          <p:cNvPr id="10" name="C3-E24 arrow 8" descr="sci-ppt:o008"/>
+          <p:cNvPr id="11" name="C3-E24 line 9" descr="sci-ppt:o009"/>
           <p:cNvCxnSpPr/>
           <p:nvPr/>
         </p:nvCxnSpPr>
         <p:spPr>
           <a:xfrm>
-            <a:off x="5669280" y="1874519"/>
-            <a:ext cx="2743200" cy="0"/>
+            <a:off x="3931920" y="5029200"/>
+            <a:ext cx="0" cy="64008"/>
           </a:xfrm>
           <a:prstGeom prst="line">
             <a:avLst/>
           </a:prstGeom>
-          <a:ln w="25400">
-            <a:solidFill>
-              <a:srgbClr val="8EDBD4"/>
-            </a:solidFill>
-            <a:headEnd type="none" w="med" len="med"/>
-            <a:tailEnd type="triangle" w="med" len="med"/>
-          </a:ln>
-          <a:effectLst/>
-        </p:spPr>
-      </p:cxnSp>
-      <p:sp>
-        <p:nvSpPr>
-          <p:cNvPr id="11" name="C3-E24 rect 9" descr="sci-ppt:o009"/>
-          <p:cNvSpPr/>
-          <p:nvPr/>
-        </p:nvSpPr>
-        <p:spPr>
-          <a:xfrm>
-            <a:off x="8412480" y="960120"/>
-            <a:ext cx="137160" cy="1645920"/>
-          </a:xfrm>
-          <a:prstGeom prst="rect">
-            <a:avLst/>
-          </a:prstGeom>
-          <a:solidFill>
-            <a:srgbClr val="213E4B"/>
-          </a:solidFill>
-          <a:ln w="19050">
+          <a:ln w="12700">
             <a:solidFill>
               <a:srgbClr val="B4C7D2"/>
             </a:solidFill>
           </a:ln>
           <a:effectLst/>
         </p:spPr>
-        <p:txBody>
-          <a:bodyPr rtlCol="0" anchor="ctr"/>
-          <a:lstStyle/>
-          <a:p>
-            <a:pPr algn="ctr"/>
-          </a:p>
-        </p:txBody>
-      </p:sp>
+      </p:cxnSp>
       <p:cxnSp>
         <p:nvCxnSpPr>
-          <p:cNvPr id="12" name="C3-E24 arrow 10" descr="sci-ppt:o010"/>
+          <p:cNvPr id="12" name="C3-E24 line 10" descr="sci-ppt:o010"/>
           <p:cNvCxnSpPr/>
           <p:nvPr/>
         </p:nvCxnSpPr>
         <p:spPr>
-          <a:xfrm flipH="1">
-            <a:off x="6217920" y="1234440"/>
-            <a:ext cx="1828800" cy="0"/>
+          <a:xfrm>
+            <a:off x="3931920" y="1371600"/>
+            <a:ext cx="0" cy="3657600"/>
           </a:xfrm>
           <a:prstGeom prst="line">
             <a:avLst/>
           </a:prstGeom>
-          <a:ln w="25400">
+          <a:ln w="7620">
             <a:solidFill>
-              <a:srgbClr val="8EDBD4"/>
+              <a:srgbClr val="2E4756"/>
             </a:solidFill>
-            <a:headEnd type="none" w="med" len="med"/>
-            <a:tailEnd type="triangle" w="med" len="med"/>
           </a:ln>
           <a:effectLst/>
         </p:spPr>
       </p:cxnSp>
-      <p:cxnSp>
-        <p:nvCxnSpPr>
-          <p:cNvPr id="13" name="C3-E24 arrow 11" descr="sci-ppt:o011"/>
-          <p:cNvCxnSpPr/>
-          <p:nvPr/>
-        </p:nvCxnSpPr>
-        <p:spPr>
-          <a:xfrm>
-            <a:off x="8778240" y="1234440"/>
-            <a:ext cx="2011680" cy="0"/>
-          </a:xfrm>
-          <a:prstGeom prst="line">
-            <a:avLst/>
-          </a:prstGeom>
-          <a:ln w="25400">
-            <a:solidFill>
-              <a:srgbClr val="8EDBD4"/>
-            </a:solidFill>
-            <a:headEnd type="none" w="med" len="med"/>
-            <a:tailEnd type="triangle" w="med" len="med"/>
-          </a:ln>
-          <a:effectLst/>
-        </p:spPr>
-      </p:cxnSp>
-      <p:sp>
-        <p:nvSpPr>
-          <p:cNvPr id="14" name="C3-E24 text 12" descr="sci-ppt:o012"/>
+      <p:sp>
+        <p:nvSpPr>
+          <p:cNvPr id="13" name="C3-E24 text 11" descr="sci-ppt:o011"/>
           <p:cNvSpPr txBox="1"/>
           <p:nvPr/>
         </p:nvSpPr>
         <p:spPr>
           <a:xfrm>
-            <a:off x="5394960" y="731520"/>
-            <a:ext cx="2971800" cy="411480"/>
+            <a:off x="3474720" y="5111496"/>
+            <a:ext cx="914400" cy="208407"/>
           </a:xfrm>
           <a:prstGeom prst="rect">
             <a:avLst/>
@@ -3478,38 +3410,82 @@
           <a:effectLst/>
         </p:spPr>
         <p:txBody>
-          <a:bodyPr wrap="square" lIns="27432" rIns="27432" tIns="18288" bIns="18288" anchor="ctr">
+          <a:bodyPr wrap="none" lIns="18288" rIns="18288" tIns="18288" bIns="18288" anchor="t">
             <a:spAutoFit/>
           </a:bodyPr>
           <a:lstStyle/>
           <a:p>
-            <a:pPr algn="l">
+            <a:pPr algn="ctr">
               <a:spcAft>
                 <a:spcPts val="0"/>
               </a:spcAft>
             </a:pPr>
             <a:r>
-              <a:rPr sz="1400" b="0" i="0">
+              <a:rPr sz="1050" b="0" i="0">
                 <a:solidFill>
-                  <a:srgbClr val="E7F0F3"/>
+                  <a:srgbClr val="B4C7D2"/>
                 </a:solidFill>
                 <a:latin typeface="Arial"/>
               </a:rPr>
-              <a:t>Liquid deceleration wave ←</a:t>
-            </a:r>
-          </a:p>
-        </p:txBody>
-      </p:sp>
-      <p:sp>
-        <p:nvSpPr>
-          <p:cNvPr id="15" name="C3-E24 text 13" descr="sci-ppt:o013"/>
+              <a:t>1</a:t>
+            </a:r>
+          </a:p>
+        </p:txBody>
+      </p:sp>
+      <p:cxnSp>
+        <p:nvCxnSpPr>
+          <p:cNvPr id="14" name="C3-E24 line 12" descr="sci-ppt:o012"/>
+          <p:cNvCxnSpPr/>
+          <p:nvPr/>
+        </p:nvCxnSpPr>
+        <p:spPr>
+          <a:xfrm>
+            <a:off x="5440679" y="5029200"/>
+            <a:ext cx="0" cy="64008"/>
+          </a:xfrm>
+          <a:prstGeom prst="line">
+            <a:avLst/>
+          </a:prstGeom>
+          <a:ln w="12700">
+            <a:solidFill>
+              <a:srgbClr val="B4C7D2"/>
+            </a:solidFill>
+          </a:ln>
+          <a:effectLst/>
+        </p:spPr>
+      </p:cxnSp>
+      <p:cxnSp>
+        <p:nvCxnSpPr>
+          <p:cNvPr id="15" name="C3-E24 line 13" descr="sci-ppt:o013"/>
+          <p:cNvCxnSpPr/>
+          <p:nvPr/>
+        </p:nvCxnSpPr>
+        <p:spPr>
+          <a:xfrm>
+            <a:off x="5440679" y="1371600"/>
+            <a:ext cx="0" cy="3657600"/>
+          </a:xfrm>
+          <a:prstGeom prst="line">
+            <a:avLst/>
+          </a:prstGeom>
+          <a:ln w="7620">
+            <a:solidFill>
+              <a:srgbClr val="2E4756"/>
+            </a:solidFill>
+          </a:ln>
+          <a:effectLst/>
+        </p:spPr>
+      </p:cxnSp>
+      <p:sp>
+        <p:nvSpPr>
+          <p:cNvPr id="16" name="C3-E24 text 14" descr="sci-ppt:o014"/>
           <p:cNvSpPr txBox="1"/>
           <p:nvPr/>
         </p:nvSpPr>
         <p:spPr>
           <a:xfrm>
-            <a:off x="8778240" y="731520"/>
-            <a:ext cx="2926080" cy="411480"/>
+            <a:off x="4983479" y="5111496"/>
+            <a:ext cx="914400" cy="208407"/>
           </a:xfrm>
           <a:prstGeom prst="rect">
             <a:avLst/>
@@ -3518,80 +3494,24 @@
           <a:effectLst/>
         </p:spPr>
         <p:txBody>
-          <a:bodyPr wrap="square" lIns="27432" rIns="27432" tIns="18288" bIns="18288" anchor="ctr">
+          <a:bodyPr wrap="none" lIns="18288" rIns="18288" tIns="18288" bIns="18288" anchor="t">
             <a:spAutoFit/>
           </a:bodyPr>
           <a:lstStyle/>
           <a:p>
-            <a:pPr algn="l">
+            <a:pPr algn="ctr">
               <a:spcAft>
                 <a:spcPts val="0"/>
               </a:spcAft>
             </a:pPr>
             <a:r>
-              <a:rPr sz="1600" b="0" i="0">
+              <a:rPr sz="1050" b="0" i="0">
                 <a:solidFill>
-                  <a:srgbClr val="E7F0F3"/>
+                  <a:srgbClr val="B4C7D2"/>
                 </a:solidFill>
                 <a:latin typeface="Arial"/>
               </a:rPr>
-              <a:t>Receiver wave →</a:t>
-            </a:r>
-          </a:p>
-        </p:txBody>
-      </p:sp>
-      <p:sp>
-        <p:nvSpPr>
-          <p:cNvPr id="16" name="C3-E24 text 14" descr="sci-ppt:o014"/>
-          <p:cNvSpPr txBox="1"/>
-          <p:nvPr/>
-        </p:nvSpPr>
-        <p:spPr>
-          <a:xfrm>
-            <a:off x="6126480" y="2834640"/>
-            <a:ext cx="5394960" cy="822960"/>
-          </a:xfrm>
-          <a:prstGeom prst="rect">
-            <a:avLst/>
-          </a:prstGeom>
-          <a:noFill/>
-          <a:effectLst/>
-        </p:spPr>
-        <p:txBody>
-          <a:bodyPr wrap="square" lIns="27432" rIns="27432" tIns="18288" bIns="18288" anchor="ctr">
-            <a:spAutoFit/>
-          </a:bodyPr>
-          <a:lstStyle/>
-          <a:p>
-            <a:pPr algn="l">
-              <a:spcAft>
-                <a:spcPts val="0"/>
-              </a:spcAft>
-            </a:pPr>
-            <a:r>
-              <a:rPr sz="1700" b="0" i="0">
-                <a:solidFill>
-                  <a:srgbClr val="8EDBD4"/>
-                </a:solidFill>
-                <a:latin typeface="Arial"/>
-              </a:rPr>
-              <a:t>Common contact velocity v_i</a:t>
-            </a:r>
-          </a:p>
-          <a:p>
-            <a:pPr algn="l">
-              <a:spcAft>
-                <a:spcPts val="0"/>
-              </a:spcAft>
-            </a:pPr>
-            <a:r>
-              <a:rPr sz="1700" b="0" i="0">
-                <a:solidFill>
-                  <a:srgbClr val="8EDBD4"/>
-                </a:solidFill>
-                <a:latin typeface="Arial"/>
-              </a:rPr>
-              <a:t>Common compressive pressure p_early</a:t>
+              <a:t>10</a:t>
             </a:r>
           </a:p>
         </p:txBody>
@@ -3604,30 +3524,52 @@
         </p:nvCxnSpPr>
         <p:spPr>
           <a:xfrm>
-            <a:off x="274320" y="3977639"/>
-            <a:ext cx="11612880" cy="0"/>
+            <a:off x="6949440" y="5029200"/>
+            <a:ext cx="0" cy="64008"/>
           </a:xfrm>
           <a:prstGeom prst="line">
             <a:avLst/>
           </a:prstGeom>
           <a:ln w="12700">
             <a:solidFill>
-              <a:srgbClr val="405967"/>
+              <a:srgbClr val="B4C7D2"/>
             </a:solidFill>
           </a:ln>
           <a:effectLst/>
         </p:spPr>
       </p:cxnSp>
-      <p:sp>
-        <p:nvSpPr>
-          <p:cNvPr id="18" name="C3-E24 text 16" descr="sci-ppt:o016"/>
+      <p:cxnSp>
+        <p:nvCxnSpPr>
+          <p:cNvPr id="18" name="C3-E24 line 16" descr="sci-ppt:o016"/>
+          <p:cNvCxnSpPr/>
+          <p:nvPr/>
+        </p:nvCxnSpPr>
+        <p:spPr>
+          <a:xfrm>
+            <a:off x="6949440" y="1371600"/>
+            <a:ext cx="0" cy="3657600"/>
+          </a:xfrm>
+          <a:prstGeom prst="line">
+            <a:avLst/>
+          </a:prstGeom>
+          <a:ln w="7620">
+            <a:solidFill>
+              <a:srgbClr val="2E4756"/>
+            </a:solidFill>
+          </a:ln>
+          <a:effectLst/>
+        </p:spPr>
+      </p:cxnSp>
+      <p:sp>
+        <p:nvSpPr>
+          <p:cNvPr id="19" name="C3-E24 text 17" descr="sci-ppt:o017"/>
           <p:cNvSpPr txBox="1"/>
           <p:nvPr/>
         </p:nvSpPr>
         <p:spPr>
           <a:xfrm>
-            <a:off x="320040" y="4096512"/>
-            <a:ext cx="5715000" cy="246888"/>
+            <a:off x="6492240" y="5111496"/>
+            <a:ext cx="914400" cy="208407"/>
           </a:xfrm>
           <a:prstGeom prst="rect">
             <a:avLst/>
@@ -3636,7 +3578,1857 @@
           <a:effectLst/>
         </p:spPr>
         <p:txBody>
-          <a:bodyPr wrap="square" lIns="27432" rIns="27432" tIns="18288" bIns="18288" anchor="ctr">
+          <a:bodyPr wrap="none" lIns="18288" rIns="18288" tIns="18288" bIns="18288" anchor="t">
+            <a:spAutoFit/>
+          </a:bodyPr>
+          <a:lstStyle/>
+          <a:p>
+            <a:pPr algn="ctr">
+              <a:spcAft>
+                <a:spcPts val="0"/>
+              </a:spcAft>
+            </a:pPr>
+            <a:r>
+              <a:rPr sz="1050" b="0" i="0">
+                <a:solidFill>
+                  <a:srgbClr val="B4C7D2"/>
+                </a:solidFill>
+                <a:latin typeface="Arial"/>
+              </a:rPr>
+              <a:t>100</a:t>
+            </a:r>
+          </a:p>
+        </p:txBody>
+      </p:sp>
+      <p:cxnSp>
+        <p:nvCxnSpPr>
+          <p:cNvPr id="20" name="C3-E24 line 18" descr="sci-ppt:o018"/>
+          <p:cNvCxnSpPr/>
+          <p:nvPr/>
+        </p:nvCxnSpPr>
+        <p:spPr>
+          <a:xfrm>
+            <a:off x="850392" y="5029200"/>
+            <a:ext cx="64008" cy="0"/>
+          </a:xfrm>
+          <a:prstGeom prst="line">
+            <a:avLst/>
+          </a:prstGeom>
+          <a:ln w="12700">
+            <a:solidFill>
+              <a:srgbClr val="B4C7D2"/>
+            </a:solidFill>
+          </a:ln>
+          <a:effectLst/>
+        </p:spPr>
+      </p:cxnSp>
+      <p:cxnSp>
+        <p:nvCxnSpPr>
+          <p:cNvPr id="21" name="C3-E24 line 19" descr="sci-ppt:o019"/>
+          <p:cNvCxnSpPr/>
+          <p:nvPr/>
+        </p:nvCxnSpPr>
+        <p:spPr>
+          <a:xfrm>
+            <a:off x="850392" y="4158342"/>
+            <a:ext cx="64008" cy="0"/>
+          </a:xfrm>
+          <a:prstGeom prst="line">
+            <a:avLst/>
+          </a:prstGeom>
+          <a:ln w="12700">
+            <a:solidFill>
+              <a:srgbClr val="B4C7D2"/>
+            </a:solidFill>
+          </a:ln>
+          <a:effectLst/>
+        </p:spPr>
+      </p:cxnSp>
+      <p:cxnSp>
+        <p:nvCxnSpPr>
+          <p:cNvPr id="22" name="C3-E24 line 20" descr="sci-ppt:o020"/>
+          <p:cNvCxnSpPr/>
+          <p:nvPr/>
+        </p:nvCxnSpPr>
+        <p:spPr>
+          <a:xfrm>
+            <a:off x="914400" y="4158342"/>
+            <a:ext cx="6035040" cy="0"/>
+          </a:xfrm>
+          <a:prstGeom prst="line">
+            <a:avLst/>
+          </a:prstGeom>
+          <a:ln w="7620">
+            <a:solidFill>
+              <a:srgbClr val="2E4756"/>
+            </a:solidFill>
+          </a:ln>
+          <a:effectLst/>
+        </p:spPr>
+      </p:cxnSp>
+      <p:sp>
+        <p:nvSpPr>
+          <p:cNvPr id="23" name="C3-E24 text 21" descr="sci-ppt:o021"/>
+          <p:cNvSpPr txBox="1"/>
+          <p:nvPr/>
+        </p:nvSpPr>
+        <p:spPr>
+          <a:xfrm>
+            <a:off x="45720" y="4076046"/>
+            <a:ext cx="777240" cy="208407"/>
+          </a:xfrm>
+          <a:prstGeom prst="rect">
+            <a:avLst/>
+          </a:prstGeom>
+          <a:noFill/>
+          <a:effectLst/>
+        </p:spPr>
+        <p:txBody>
+          <a:bodyPr wrap="none" lIns="18288" rIns="18288" tIns="18288" bIns="18288" anchor="t">
+            <a:spAutoFit/>
+          </a:bodyPr>
+          <a:lstStyle/>
+          <a:p>
+            <a:pPr algn="r">
+              <a:spcAft>
+                <a:spcPts val="0"/>
+              </a:spcAft>
+            </a:pPr>
+            <a:r>
+              <a:rPr sz="1050" b="0" i="0">
+                <a:solidFill>
+                  <a:srgbClr val="B4C7D2"/>
+                </a:solidFill>
+                <a:latin typeface="Arial"/>
+              </a:rPr>
+              <a:t>0.25</a:t>
+            </a:r>
+          </a:p>
+        </p:txBody>
+      </p:sp>
+      <p:cxnSp>
+        <p:nvCxnSpPr>
+          <p:cNvPr id="24" name="C3-E24 line 22" descr="sci-ppt:o022"/>
+          <p:cNvCxnSpPr/>
+          <p:nvPr/>
+        </p:nvCxnSpPr>
+        <p:spPr>
+          <a:xfrm>
+            <a:off x="850392" y="3287485"/>
+            <a:ext cx="64008" cy="0"/>
+          </a:xfrm>
+          <a:prstGeom prst="line">
+            <a:avLst/>
+          </a:prstGeom>
+          <a:ln w="12700">
+            <a:solidFill>
+              <a:srgbClr val="B4C7D2"/>
+            </a:solidFill>
+          </a:ln>
+          <a:effectLst/>
+        </p:spPr>
+      </p:cxnSp>
+      <p:cxnSp>
+        <p:nvCxnSpPr>
+          <p:cNvPr id="25" name="C3-E24 line 23" descr="sci-ppt:o023"/>
+          <p:cNvCxnSpPr/>
+          <p:nvPr/>
+        </p:nvCxnSpPr>
+        <p:spPr>
+          <a:xfrm>
+            <a:off x="914400" y="3287485"/>
+            <a:ext cx="6035040" cy="0"/>
+          </a:xfrm>
+          <a:prstGeom prst="line">
+            <a:avLst/>
+          </a:prstGeom>
+          <a:ln w="7620">
+            <a:solidFill>
+              <a:srgbClr val="2E4756"/>
+            </a:solidFill>
+          </a:ln>
+          <a:effectLst/>
+        </p:spPr>
+      </p:cxnSp>
+      <p:sp>
+        <p:nvSpPr>
+          <p:cNvPr id="26" name="C3-E24 text 24" descr="sci-ppt:o024"/>
+          <p:cNvSpPr txBox="1"/>
+          <p:nvPr/>
+        </p:nvSpPr>
+        <p:spPr>
+          <a:xfrm>
+            <a:off x="45720" y="3205189"/>
+            <a:ext cx="777240" cy="208407"/>
+          </a:xfrm>
+          <a:prstGeom prst="rect">
+            <a:avLst/>
+          </a:prstGeom>
+          <a:noFill/>
+          <a:effectLst/>
+        </p:spPr>
+        <p:txBody>
+          <a:bodyPr wrap="none" lIns="18288" rIns="18288" tIns="18288" bIns="18288" anchor="t">
+            <a:spAutoFit/>
+          </a:bodyPr>
+          <a:lstStyle/>
+          <a:p>
+            <a:pPr algn="r">
+              <a:spcAft>
+                <a:spcPts val="0"/>
+              </a:spcAft>
+            </a:pPr>
+            <a:r>
+              <a:rPr sz="1050" b="0" i="0">
+                <a:solidFill>
+                  <a:srgbClr val="B4C7D2"/>
+                </a:solidFill>
+                <a:latin typeface="Arial"/>
+              </a:rPr>
+              <a:t>0.50</a:t>
+            </a:r>
+          </a:p>
+        </p:txBody>
+      </p:sp>
+      <p:cxnSp>
+        <p:nvCxnSpPr>
+          <p:cNvPr id="27" name="C3-E24 line 25" descr="sci-ppt:o025"/>
+          <p:cNvCxnSpPr/>
+          <p:nvPr/>
+        </p:nvCxnSpPr>
+        <p:spPr>
+          <a:xfrm>
+            <a:off x="850392" y="2416628"/>
+            <a:ext cx="64008" cy="0"/>
+          </a:xfrm>
+          <a:prstGeom prst="line">
+            <a:avLst/>
+          </a:prstGeom>
+          <a:ln w="12700">
+            <a:solidFill>
+              <a:srgbClr val="B4C7D2"/>
+            </a:solidFill>
+          </a:ln>
+          <a:effectLst/>
+        </p:spPr>
+      </p:cxnSp>
+      <p:cxnSp>
+        <p:nvCxnSpPr>
+          <p:cNvPr id="28" name="C3-E24 line 26" descr="sci-ppt:o026"/>
+          <p:cNvCxnSpPr/>
+          <p:nvPr/>
+        </p:nvCxnSpPr>
+        <p:spPr>
+          <a:xfrm>
+            <a:off x="914400" y="2416628"/>
+            <a:ext cx="6035040" cy="0"/>
+          </a:xfrm>
+          <a:prstGeom prst="line">
+            <a:avLst/>
+          </a:prstGeom>
+          <a:ln w="7620">
+            <a:solidFill>
+              <a:srgbClr val="2E4756"/>
+            </a:solidFill>
+          </a:ln>
+          <a:effectLst/>
+        </p:spPr>
+      </p:cxnSp>
+      <p:sp>
+        <p:nvSpPr>
+          <p:cNvPr id="29" name="C3-E24 text 27" descr="sci-ppt:o027"/>
+          <p:cNvSpPr txBox="1"/>
+          <p:nvPr/>
+        </p:nvSpPr>
+        <p:spPr>
+          <a:xfrm>
+            <a:off x="45720" y="2334332"/>
+            <a:ext cx="777240" cy="208407"/>
+          </a:xfrm>
+          <a:prstGeom prst="rect">
+            <a:avLst/>
+          </a:prstGeom>
+          <a:noFill/>
+          <a:effectLst/>
+        </p:spPr>
+        <p:txBody>
+          <a:bodyPr wrap="none" lIns="18288" rIns="18288" tIns="18288" bIns="18288" anchor="t">
+            <a:spAutoFit/>
+          </a:bodyPr>
+          <a:lstStyle/>
+          <a:p>
+            <a:pPr algn="r">
+              <a:spcAft>
+                <a:spcPts val="0"/>
+              </a:spcAft>
+            </a:pPr>
+            <a:r>
+              <a:rPr sz="1050" b="0" i="0">
+                <a:solidFill>
+                  <a:srgbClr val="B4C7D2"/>
+                </a:solidFill>
+                <a:latin typeface="Arial"/>
+              </a:rPr>
+              <a:t>0.75</a:t>
+            </a:r>
+          </a:p>
+        </p:txBody>
+      </p:sp>
+      <p:cxnSp>
+        <p:nvCxnSpPr>
+          <p:cNvPr id="30" name="C3-E24 line 28" descr="sci-ppt:o028"/>
+          <p:cNvCxnSpPr/>
+          <p:nvPr/>
+        </p:nvCxnSpPr>
+        <p:spPr>
+          <a:xfrm>
+            <a:off x="850392" y="1545771"/>
+            <a:ext cx="64008" cy="0"/>
+          </a:xfrm>
+          <a:prstGeom prst="line">
+            <a:avLst/>
+          </a:prstGeom>
+          <a:ln w="12700">
+            <a:solidFill>
+              <a:srgbClr val="B4C7D2"/>
+            </a:solidFill>
+          </a:ln>
+          <a:effectLst/>
+        </p:spPr>
+      </p:cxnSp>
+      <p:cxnSp>
+        <p:nvCxnSpPr>
+          <p:cNvPr id="31" name="C3-E24 line 29" descr="sci-ppt:o029"/>
+          <p:cNvCxnSpPr/>
+          <p:nvPr/>
+        </p:nvCxnSpPr>
+        <p:spPr>
+          <a:xfrm>
+            <a:off x="914400" y="1545771"/>
+            <a:ext cx="6035040" cy="0"/>
+          </a:xfrm>
+          <a:prstGeom prst="line">
+            <a:avLst/>
+          </a:prstGeom>
+          <a:ln w="7620">
+            <a:solidFill>
+              <a:srgbClr val="2E4756"/>
+            </a:solidFill>
+          </a:ln>
+          <a:effectLst/>
+        </p:spPr>
+      </p:cxnSp>
+      <p:sp>
+        <p:nvSpPr>
+          <p:cNvPr id="32" name="C3-E24 text 30" descr="sci-ppt:o030"/>
+          <p:cNvSpPr txBox="1"/>
+          <p:nvPr/>
+        </p:nvSpPr>
+        <p:spPr>
+          <a:xfrm>
+            <a:off x="45720" y="1463475"/>
+            <a:ext cx="777240" cy="208407"/>
+          </a:xfrm>
+          <a:prstGeom prst="rect">
+            <a:avLst/>
+          </a:prstGeom>
+          <a:noFill/>
+          <a:effectLst/>
+        </p:spPr>
+        <p:txBody>
+          <a:bodyPr wrap="none" lIns="18288" rIns="18288" tIns="18288" bIns="18288" anchor="t">
+            <a:spAutoFit/>
+          </a:bodyPr>
+          <a:lstStyle/>
+          <a:p>
+            <a:pPr algn="r">
+              <a:spcAft>
+                <a:spcPts val="0"/>
+              </a:spcAft>
+            </a:pPr>
+            <a:r>
+              <a:rPr sz="1050" b="0" i="0">
+                <a:solidFill>
+                  <a:srgbClr val="B4C7D2"/>
+                </a:solidFill>
+                <a:latin typeface="Arial"/>
+              </a:rPr>
+              <a:t>1.00</a:t>
+            </a:r>
+          </a:p>
+        </p:txBody>
+      </p:sp>
+      <p:sp>
+        <p:nvSpPr>
+          <p:cNvPr id="33" name="C3-E24 text 31" descr="sci-ppt:o031"/>
+          <p:cNvSpPr txBox="1"/>
+          <p:nvPr/>
+        </p:nvSpPr>
+        <p:spPr>
+          <a:xfrm>
+            <a:off x="914400" y="5312664"/>
+            <a:ext cx="6035040" cy="231648"/>
+          </a:xfrm>
+          <a:prstGeom prst="rect">
+            <a:avLst/>
+          </a:prstGeom>
+          <a:noFill/>
+          <a:effectLst/>
+        </p:spPr>
+        <p:txBody>
+          <a:bodyPr wrap="none" lIns="18288" rIns="18288" tIns="18288" bIns="18288" anchor="t">
+            <a:spAutoFit/>
+          </a:bodyPr>
+          <a:lstStyle/>
+          <a:p>
+            <a:pPr algn="ctr">
+              <a:spcAft>
+                <a:spcPts val="0"/>
+              </a:spcAft>
+            </a:pPr>
+            <a:r>
+              <a:rPr sz="1200" b="0" i="0">
+                <a:solidFill>
+                  <a:srgbClr val="E7F0F3"/>
+                </a:solidFill>
+                <a:latin typeface="Arial"/>
+              </a:rPr>
+              <a:t>receiver impedance ratio Zᵣ / Zₗ</a:t>
+            </a:r>
+          </a:p>
+        </p:txBody>
+      </p:sp>
+      <p:sp>
+        <p:nvSpPr>
+          <p:cNvPr id="34" name="C3-E24 text 32" descr="sci-ppt:o032"/>
+          <p:cNvSpPr txBox="1"/>
+          <p:nvPr/>
+        </p:nvSpPr>
+        <p:spPr>
+          <a:xfrm>
+            <a:off x="365760" y="1024128"/>
+            <a:ext cx="6035040" cy="231648"/>
+          </a:xfrm>
+          <a:prstGeom prst="rect">
+            <a:avLst/>
+          </a:prstGeom>
+          <a:noFill/>
+          <a:effectLst/>
+        </p:spPr>
+        <p:txBody>
+          <a:bodyPr wrap="none" lIns="18288" rIns="18288" tIns="18288" bIns="18288" anchor="t">
+            <a:spAutoFit/>
+          </a:bodyPr>
+          <a:lstStyle/>
+          <a:p>
+            <a:pPr algn="l">
+              <a:spcAft>
+                <a:spcPts val="0"/>
+              </a:spcAft>
+            </a:pPr>
+            <a:r>
+              <a:rPr sz="1200" b="0" i="0">
+                <a:solidFill>
+                  <a:srgbClr val="E7F0F3"/>
+                </a:solidFill>
+                <a:latin typeface="Arial"/>
+              </a:rPr>
+              <a:t>fraction of ρ c Uⱼ  or  of Uⱼ</a:t>
+            </a:r>
+          </a:p>
+        </p:txBody>
+      </p:sp>
+      <p:sp>
+        <p:nvSpPr>
+          <p:cNvPr id="35" name="C3-E24 polygon 33" descr="sci-ppt:o033"/>
+          <p:cNvSpPr/>
+          <p:nvPr/>
+        </p:nvSpPr>
+        <p:spPr>
+          <a:xfrm>
+            <a:off x="914400" y="1580260"/>
+            <a:ext cx="6035040" cy="3414450"/>
+          </a:xfrm>
+          <a:custGeom>
+            <a:avLst/>
+            <a:gdLst/>
+            <a:ahLst/>
+            <a:cxnLst/>
+            <a:rect l="l" t="t" r="r" b="b"/>
+            <a:pathLst>
+              <a:path w="6035040" h="3414450">
+                <a:moveTo>
+                  <a:pt x="0" y="3414450"/>
+                </a:moveTo>
+                <a:lnTo>
+                  <a:pt x="30326" y="3412833"/>
+                </a:lnTo>
+                <a:lnTo>
+                  <a:pt x="60653" y="3411141"/>
+                </a:lnTo>
+                <a:lnTo>
+                  <a:pt x="90980" y="3409371"/>
+                </a:lnTo>
+                <a:lnTo>
+                  <a:pt x="121307" y="3407519"/>
+                </a:lnTo>
+                <a:lnTo>
+                  <a:pt x="151634" y="3405581"/>
+                </a:lnTo>
+                <a:lnTo>
+                  <a:pt x="181961" y="3403554"/>
+                </a:lnTo>
+                <a:lnTo>
+                  <a:pt x="212287" y="3401434"/>
+                </a:lnTo>
+                <a:lnTo>
+                  <a:pt x="242614" y="3399215"/>
+                </a:lnTo>
+                <a:lnTo>
+                  <a:pt x="272941" y="3396895"/>
+                </a:lnTo>
+                <a:lnTo>
+                  <a:pt x="303268" y="3394468"/>
+                </a:lnTo>
+                <a:lnTo>
+                  <a:pt x="333595" y="3391930"/>
+                </a:lnTo>
+                <a:lnTo>
+                  <a:pt x="363922" y="3389276"/>
+                </a:lnTo>
+                <a:lnTo>
+                  <a:pt x="394248" y="3386500"/>
+                </a:lnTo>
+                <a:lnTo>
+                  <a:pt x="424575" y="3383598"/>
+                </a:lnTo>
+                <a:lnTo>
+                  <a:pt x="454902" y="3380563"/>
+                </a:lnTo>
+                <a:lnTo>
+                  <a:pt x="485229" y="3377391"/>
+                </a:lnTo>
+                <a:lnTo>
+                  <a:pt x="515556" y="3374074"/>
+                </a:lnTo>
+                <a:lnTo>
+                  <a:pt x="545883" y="3370608"/>
+                </a:lnTo>
+                <a:lnTo>
+                  <a:pt x="576209" y="3366984"/>
+                </a:lnTo>
+                <a:lnTo>
+                  <a:pt x="606536" y="3363198"/>
+                </a:lnTo>
+                <a:lnTo>
+                  <a:pt x="636863" y="3359240"/>
+                </a:lnTo>
+                <a:lnTo>
+                  <a:pt x="667190" y="3355106"/>
+                </a:lnTo>
+                <a:lnTo>
+                  <a:pt x="697517" y="3350786"/>
+                </a:lnTo>
+                <a:lnTo>
+                  <a:pt x="727844" y="3346273"/>
+                </a:lnTo>
+                <a:lnTo>
+                  <a:pt x="758170" y="3341560"/>
+                </a:lnTo>
+                <a:lnTo>
+                  <a:pt x="788497" y="3336637"/>
+                </a:lnTo>
+                <a:lnTo>
+                  <a:pt x="818824" y="3331497"/>
+                </a:lnTo>
+                <a:lnTo>
+                  <a:pt x="849151" y="3326130"/>
+                </a:lnTo>
+                <a:lnTo>
+                  <a:pt x="879478" y="3320526"/>
+                </a:lnTo>
+                <a:lnTo>
+                  <a:pt x="909805" y="3314678"/>
+                </a:lnTo>
+                <a:lnTo>
+                  <a:pt x="940131" y="3308574"/>
+                </a:lnTo>
+                <a:lnTo>
+                  <a:pt x="970458" y="3302205"/>
+                </a:lnTo>
+                <a:lnTo>
+                  <a:pt x="1000785" y="3295560"/>
+                </a:lnTo>
+                <a:lnTo>
+                  <a:pt x="1031112" y="3288629"/>
+                </a:lnTo>
+                <a:lnTo>
+                  <a:pt x="1061439" y="3281400"/>
+                </a:lnTo>
+                <a:lnTo>
+                  <a:pt x="1091766" y="3273862"/>
+                </a:lnTo>
+                <a:lnTo>
+                  <a:pt x="1122092" y="3266004"/>
+                </a:lnTo>
+                <a:lnTo>
+                  <a:pt x="1152419" y="3257814"/>
+                </a:lnTo>
+                <a:lnTo>
+                  <a:pt x="1182746" y="3249279"/>
+                </a:lnTo>
+                <a:lnTo>
+                  <a:pt x="1213073" y="3240387"/>
+                </a:lnTo>
+                <a:lnTo>
+                  <a:pt x="1243400" y="3231126"/>
+                </a:lnTo>
+                <a:lnTo>
+                  <a:pt x="1273727" y="3221481"/>
+                </a:lnTo>
+                <a:lnTo>
+                  <a:pt x="1304053" y="3211441"/>
+                </a:lnTo>
+                <a:lnTo>
+                  <a:pt x="1334380" y="3200991"/>
+                </a:lnTo>
+                <a:lnTo>
+                  <a:pt x="1364707" y="3190119"/>
+                </a:lnTo>
+                <a:lnTo>
+                  <a:pt x="1395034" y="3178809"/>
+                </a:lnTo>
+                <a:lnTo>
+                  <a:pt x="1425361" y="3167048"/>
+                </a:lnTo>
+                <a:lnTo>
+                  <a:pt x="1455688" y="3154822"/>
+                </a:lnTo>
+                <a:lnTo>
+                  <a:pt x="1486014" y="3142116"/>
+                </a:lnTo>
+                <a:lnTo>
+                  <a:pt x="1516341" y="3128917"/>
+                </a:lnTo>
+                <a:lnTo>
+                  <a:pt x="1546668" y="3115210"/>
+                </a:lnTo>
+                <a:lnTo>
+                  <a:pt x="1576995" y="3100980"/>
+                </a:lnTo>
+                <a:lnTo>
+                  <a:pt x="1607322" y="3086213"/>
+                </a:lnTo>
+                <a:lnTo>
+                  <a:pt x="1637649" y="3070895"/>
+                </a:lnTo>
+                <a:lnTo>
+                  <a:pt x="1667975" y="3055012"/>
+                </a:lnTo>
+                <a:lnTo>
+                  <a:pt x="1698302" y="3038550"/>
+                </a:lnTo>
+                <a:lnTo>
+                  <a:pt x="1728629" y="3021495"/>
+                </a:lnTo>
+                <a:lnTo>
+                  <a:pt x="1758956" y="3003834"/>
+                </a:lnTo>
+                <a:lnTo>
+                  <a:pt x="1789283" y="2985554"/>
+                </a:lnTo>
+                <a:lnTo>
+                  <a:pt x="1819610" y="2966642"/>
+                </a:lnTo>
+                <a:lnTo>
+                  <a:pt x="1849936" y="2947087"/>
+                </a:lnTo>
+                <a:lnTo>
+                  <a:pt x="1880263" y="2926876"/>
+                </a:lnTo>
+                <a:lnTo>
+                  <a:pt x="1910590" y="2906000"/>
+                </a:lnTo>
+                <a:lnTo>
+                  <a:pt x="1940917" y="2884449"/>
+                </a:lnTo>
+                <a:lnTo>
+                  <a:pt x="1971244" y="2862212"/>
+                </a:lnTo>
+                <a:lnTo>
+                  <a:pt x="2001571" y="2839283"/>
+                </a:lnTo>
+                <a:lnTo>
+                  <a:pt x="2031897" y="2815653"/>
+                </a:lnTo>
+                <a:lnTo>
+                  <a:pt x="2062224" y="2791317"/>
+                </a:lnTo>
+                <a:lnTo>
+                  <a:pt x="2092551" y="2766270"/>
+                </a:lnTo>
+                <a:lnTo>
+                  <a:pt x="2122878" y="2740508"/>
+                </a:lnTo>
+                <a:lnTo>
+                  <a:pt x="2153205" y="2714029"/>
+                </a:lnTo>
+                <a:lnTo>
+                  <a:pt x="2183532" y="2686832"/>
+                </a:lnTo>
+                <a:lnTo>
+                  <a:pt x="2213858" y="2658918"/>
+                </a:lnTo>
+                <a:lnTo>
+                  <a:pt x="2244185" y="2630289"/>
+                </a:lnTo>
+                <a:lnTo>
+                  <a:pt x="2274512" y="2600950"/>
+                </a:lnTo>
+                <a:lnTo>
+                  <a:pt x="2304839" y="2570905"/>
+                </a:lnTo>
+                <a:lnTo>
+                  <a:pt x="2335166" y="2540163"/>
+                </a:lnTo>
+                <a:lnTo>
+                  <a:pt x="2365493" y="2508733"/>
+                </a:lnTo>
+                <a:lnTo>
+                  <a:pt x="2395819" y="2476626"/>
+                </a:lnTo>
+                <a:lnTo>
+                  <a:pt x="2426146" y="2443856"/>
+                </a:lnTo>
+                <a:lnTo>
+                  <a:pt x="2456473" y="2410439"/>
+                </a:lnTo>
+                <a:lnTo>
+                  <a:pt x="2486800" y="2376391"/>
+                </a:lnTo>
+                <a:lnTo>
+                  <a:pt x="2517127" y="2341733"/>
+                </a:lnTo>
+                <a:lnTo>
+                  <a:pt x="2547454" y="2306485"/>
+                </a:lnTo>
+                <a:lnTo>
+                  <a:pt x="2577780" y="2270672"/>
+                </a:lnTo>
+                <a:lnTo>
+                  <a:pt x="2608107" y="2234318"/>
+                </a:lnTo>
+                <a:lnTo>
+                  <a:pt x="2638434" y="2197452"/>
+                </a:lnTo>
+                <a:lnTo>
+                  <a:pt x="2668761" y="2160103"/>
+                </a:lnTo>
+                <a:lnTo>
+                  <a:pt x="2699088" y="2122301"/>
+                </a:lnTo>
+                <a:lnTo>
+                  <a:pt x="2729415" y="2084080"/>
+                </a:lnTo>
+                <a:lnTo>
+                  <a:pt x="2759741" y="2045475"/>
+                </a:lnTo>
+                <a:lnTo>
+                  <a:pt x="2790068" y="2006521"/>
+                </a:lnTo>
+                <a:lnTo>
+                  <a:pt x="2820395" y="1967256"/>
+                </a:lnTo>
+                <a:lnTo>
+                  <a:pt x="2850722" y="1927719"/>
+                </a:lnTo>
+                <a:lnTo>
+                  <a:pt x="2881049" y="1887949"/>
+                </a:lnTo>
+                <a:lnTo>
+                  <a:pt x="2911376" y="1847988"/>
+                </a:lnTo>
+                <a:lnTo>
+                  <a:pt x="2941702" y="1807878"/>
+                </a:lnTo>
+                <a:lnTo>
+                  <a:pt x="2972029" y="1767660"/>
+                </a:lnTo>
+                <a:lnTo>
+                  <a:pt x="3002356" y="1727377"/>
+                </a:lnTo>
+                <a:lnTo>
+                  <a:pt x="3032683" y="1687073"/>
+                </a:lnTo>
+                <a:lnTo>
+                  <a:pt x="3063010" y="1646791"/>
+                </a:lnTo>
+                <a:lnTo>
+                  <a:pt x="3093337" y="1606573"/>
+                </a:lnTo>
+                <a:lnTo>
+                  <a:pt x="3123663" y="1566462"/>
+                </a:lnTo>
+                <a:lnTo>
+                  <a:pt x="3153990" y="1526501"/>
+                </a:lnTo>
+                <a:lnTo>
+                  <a:pt x="3184317" y="1486732"/>
+                </a:lnTo>
+                <a:lnTo>
+                  <a:pt x="3214644" y="1447195"/>
+                </a:lnTo>
+                <a:lnTo>
+                  <a:pt x="3244971" y="1407930"/>
+                </a:lnTo>
+                <a:lnTo>
+                  <a:pt x="3275298" y="1368976"/>
+                </a:lnTo>
+                <a:lnTo>
+                  <a:pt x="3305624" y="1330370"/>
+                </a:lnTo>
+                <a:lnTo>
+                  <a:pt x="3335951" y="1292149"/>
+                </a:lnTo>
+                <a:lnTo>
+                  <a:pt x="3366278" y="1254348"/>
+                </a:lnTo>
+                <a:lnTo>
+                  <a:pt x="3396605" y="1216998"/>
+                </a:lnTo>
+                <a:lnTo>
+                  <a:pt x="3426932" y="1180132"/>
+                </a:lnTo>
+                <a:lnTo>
+                  <a:pt x="3457259" y="1143779"/>
+                </a:lnTo>
+                <a:lnTo>
+                  <a:pt x="3487585" y="1107965"/>
+                </a:lnTo>
+                <a:lnTo>
+                  <a:pt x="3517912" y="1072718"/>
+                </a:lnTo>
+                <a:lnTo>
+                  <a:pt x="3548239" y="1038059"/>
+                </a:lnTo>
+                <a:lnTo>
+                  <a:pt x="3578566" y="1004012"/>
+                </a:lnTo>
+                <a:lnTo>
+                  <a:pt x="3608893" y="970594"/>
+                </a:lnTo>
+                <a:lnTo>
+                  <a:pt x="3639220" y="937824"/>
+                </a:lnTo>
+                <a:lnTo>
+                  <a:pt x="3669546" y="905718"/>
+                </a:lnTo>
+                <a:lnTo>
+                  <a:pt x="3699873" y="874288"/>
+                </a:lnTo>
+                <a:lnTo>
+                  <a:pt x="3730200" y="843545"/>
+                </a:lnTo>
+                <a:lnTo>
+                  <a:pt x="3760527" y="813501"/>
+                </a:lnTo>
+                <a:lnTo>
+                  <a:pt x="3790854" y="784161"/>
+                </a:lnTo>
+                <a:lnTo>
+                  <a:pt x="3821181" y="755532"/>
+                </a:lnTo>
+                <a:lnTo>
+                  <a:pt x="3851507" y="727618"/>
+                </a:lnTo>
+                <a:lnTo>
+                  <a:pt x="3881834" y="700421"/>
+                </a:lnTo>
+                <a:lnTo>
+                  <a:pt x="3912161" y="673942"/>
+                </a:lnTo>
+                <a:lnTo>
+                  <a:pt x="3942488" y="648180"/>
+                </a:lnTo>
+                <a:lnTo>
+                  <a:pt x="3972815" y="623133"/>
+                </a:lnTo>
+                <a:lnTo>
+                  <a:pt x="4003142" y="598797"/>
+                </a:lnTo>
+                <a:lnTo>
+                  <a:pt x="4033468" y="575168"/>
+                </a:lnTo>
+                <a:lnTo>
+                  <a:pt x="4063795" y="552238"/>
+                </a:lnTo>
+                <a:lnTo>
+                  <a:pt x="4094122" y="530002"/>
+                </a:lnTo>
+                <a:lnTo>
+                  <a:pt x="4124449" y="508450"/>
+                </a:lnTo>
+                <a:lnTo>
+                  <a:pt x="4154776" y="487574"/>
+                </a:lnTo>
+                <a:lnTo>
+                  <a:pt x="4185103" y="467364"/>
+                </a:lnTo>
+                <a:lnTo>
+                  <a:pt x="4215429" y="447809"/>
+                </a:lnTo>
+                <a:lnTo>
+                  <a:pt x="4245756" y="428897"/>
+                </a:lnTo>
+                <a:lnTo>
+                  <a:pt x="4276083" y="410617"/>
+                </a:lnTo>
+                <a:lnTo>
+                  <a:pt x="4306410" y="392955"/>
+                </a:lnTo>
+                <a:lnTo>
+                  <a:pt x="4336737" y="375900"/>
+                </a:lnTo>
+                <a:lnTo>
+                  <a:pt x="4367064" y="359438"/>
+                </a:lnTo>
+                <a:lnTo>
+                  <a:pt x="4397390" y="343555"/>
+                </a:lnTo>
+                <a:lnTo>
+                  <a:pt x="4427717" y="328237"/>
+                </a:lnTo>
+                <a:lnTo>
+                  <a:pt x="4458044" y="313470"/>
+                </a:lnTo>
+                <a:lnTo>
+                  <a:pt x="4488371" y="299240"/>
+                </a:lnTo>
+                <a:lnTo>
+                  <a:pt x="4518698" y="285533"/>
+                </a:lnTo>
+                <a:lnTo>
+                  <a:pt x="4549025" y="272334"/>
+                </a:lnTo>
+                <a:lnTo>
+                  <a:pt x="4579351" y="259629"/>
+                </a:lnTo>
+                <a:lnTo>
+                  <a:pt x="4609678" y="247403"/>
+                </a:lnTo>
+                <a:lnTo>
+                  <a:pt x="4640005" y="235642"/>
+                </a:lnTo>
+                <a:lnTo>
+                  <a:pt x="4670332" y="224332"/>
+                </a:lnTo>
+                <a:lnTo>
+                  <a:pt x="4700659" y="213459"/>
+                </a:lnTo>
+                <a:lnTo>
+                  <a:pt x="4730986" y="203009"/>
+                </a:lnTo>
+                <a:lnTo>
+                  <a:pt x="4761312" y="192969"/>
+                </a:lnTo>
+                <a:lnTo>
+                  <a:pt x="4791639" y="183325"/>
+                </a:lnTo>
+                <a:lnTo>
+                  <a:pt x="4821966" y="174063"/>
+                </a:lnTo>
+                <a:lnTo>
+                  <a:pt x="4852293" y="165171"/>
+                </a:lnTo>
+                <a:lnTo>
+                  <a:pt x="4882620" y="156637"/>
+                </a:lnTo>
+                <a:lnTo>
+                  <a:pt x="4912947" y="148446"/>
+                </a:lnTo>
+                <a:lnTo>
+                  <a:pt x="4943273" y="140588"/>
+                </a:lnTo>
+                <a:lnTo>
+                  <a:pt x="4973600" y="133051"/>
+                </a:lnTo>
+                <a:lnTo>
+                  <a:pt x="5003927" y="125822"/>
+                </a:lnTo>
+                <a:lnTo>
+                  <a:pt x="5034254" y="118890"/>
+                </a:lnTo>
+                <a:lnTo>
+                  <a:pt x="5064581" y="112246"/>
+                </a:lnTo>
+                <a:lnTo>
+                  <a:pt x="5094908" y="105876"/>
+                </a:lnTo>
+                <a:lnTo>
+                  <a:pt x="5125234" y="99773"/>
+                </a:lnTo>
+                <a:lnTo>
+                  <a:pt x="5155561" y="93924"/>
+                </a:lnTo>
+                <a:lnTo>
+                  <a:pt x="5185888" y="88321"/>
+                </a:lnTo>
+                <a:lnTo>
+                  <a:pt x="5216215" y="82954"/>
+                </a:lnTo>
+                <a:lnTo>
+                  <a:pt x="5246542" y="77813"/>
+                </a:lnTo>
+                <a:lnTo>
+                  <a:pt x="5276869" y="72890"/>
+                </a:lnTo>
+                <a:lnTo>
+                  <a:pt x="5307195" y="68177"/>
+                </a:lnTo>
+                <a:lnTo>
+                  <a:pt x="5337522" y="63664"/>
+                </a:lnTo>
+                <a:lnTo>
+                  <a:pt x="5367849" y="59345"/>
+                </a:lnTo>
+                <a:lnTo>
+                  <a:pt x="5398176" y="55210"/>
+                </a:lnTo>
+                <a:lnTo>
+                  <a:pt x="5428503" y="51253"/>
+                </a:lnTo>
+                <a:lnTo>
+                  <a:pt x="5458830" y="47466"/>
+                </a:lnTo>
+                <a:lnTo>
+                  <a:pt x="5489156" y="43843"/>
+                </a:lnTo>
+                <a:lnTo>
+                  <a:pt x="5519483" y="40376"/>
+                </a:lnTo>
+                <a:lnTo>
+                  <a:pt x="5549810" y="37060"/>
+                </a:lnTo>
+                <a:lnTo>
+                  <a:pt x="5580137" y="33887"/>
+                </a:lnTo>
+                <a:lnTo>
+                  <a:pt x="5610464" y="30853"/>
+                </a:lnTo>
+                <a:lnTo>
+                  <a:pt x="5640791" y="27950"/>
+                </a:lnTo>
+                <a:lnTo>
+                  <a:pt x="5671117" y="25175"/>
+                </a:lnTo>
+                <a:lnTo>
+                  <a:pt x="5701444" y="22520"/>
+                </a:lnTo>
+                <a:lnTo>
+                  <a:pt x="5731771" y="19982"/>
+                </a:lnTo>
+                <a:lnTo>
+                  <a:pt x="5762098" y="17555"/>
+                </a:lnTo>
+                <a:lnTo>
+                  <a:pt x="5792425" y="15235"/>
+                </a:lnTo>
+                <a:lnTo>
+                  <a:pt x="5822752" y="13017"/>
+                </a:lnTo>
+                <a:lnTo>
+                  <a:pt x="5853078" y="10896"/>
+                </a:lnTo>
+                <a:lnTo>
+                  <a:pt x="5883405" y="8869"/>
+                </a:lnTo>
+                <a:lnTo>
+                  <a:pt x="5913732" y="6931"/>
+                </a:lnTo>
+                <a:lnTo>
+                  <a:pt x="5944059" y="5079"/>
+                </a:lnTo>
+                <a:lnTo>
+                  <a:pt x="5974386" y="3309"/>
+                </a:lnTo>
+                <a:lnTo>
+                  <a:pt x="6004713" y="1617"/>
+                </a:lnTo>
+                <a:lnTo>
+                  <a:pt x="6035040" y="0"/>
+                </a:lnTo>
+              </a:path>
+            </a:pathLst>
+          </a:custGeom>
+          <a:noFill/>
+          <a:ln w="38100">
+            <a:solidFill>
+              <a:srgbClr val="8EDBD4"/>
+            </a:solidFill>
+          </a:ln>
+          <a:effectLst/>
+        </p:spPr>
+        <p:txBody>
+          <a:bodyPr rtlCol="0" anchor="ctr"/>
+          <a:lstStyle/>
+          <a:p>
+            <a:pPr algn="ctr"/>
+          </a:p>
+        </p:txBody>
+      </p:sp>
+      <p:sp>
+        <p:nvSpPr>
+          <p:cNvPr id="36" name="C3-E24 polygon 34" descr="sci-ppt:o034"/>
+          <p:cNvSpPr/>
+          <p:nvPr/>
+        </p:nvSpPr>
+        <p:spPr>
+          <a:xfrm>
+            <a:off x="914400" y="1580260"/>
+            <a:ext cx="6035040" cy="3414450"/>
+          </a:xfrm>
+          <a:custGeom>
+            <a:avLst/>
+            <a:gdLst/>
+            <a:ahLst/>
+            <a:cxnLst/>
+            <a:rect l="l" t="t" r="r" b="b"/>
+            <a:pathLst>
+              <a:path w="6035040" h="3414450">
+                <a:moveTo>
+                  <a:pt x="0" y="0"/>
+                </a:moveTo>
+                <a:lnTo>
+                  <a:pt x="30326" y="1617"/>
+                </a:lnTo>
+                <a:lnTo>
+                  <a:pt x="60653" y="3309"/>
+                </a:lnTo>
+                <a:lnTo>
+                  <a:pt x="90980" y="5079"/>
+                </a:lnTo>
+                <a:lnTo>
+                  <a:pt x="121307" y="6931"/>
+                </a:lnTo>
+                <a:lnTo>
+                  <a:pt x="151634" y="8869"/>
+                </a:lnTo>
+                <a:lnTo>
+                  <a:pt x="181961" y="10896"/>
+                </a:lnTo>
+                <a:lnTo>
+                  <a:pt x="212287" y="13017"/>
+                </a:lnTo>
+                <a:lnTo>
+                  <a:pt x="242614" y="15235"/>
+                </a:lnTo>
+                <a:lnTo>
+                  <a:pt x="272941" y="17555"/>
+                </a:lnTo>
+                <a:lnTo>
+                  <a:pt x="303268" y="19982"/>
+                </a:lnTo>
+                <a:lnTo>
+                  <a:pt x="333595" y="22520"/>
+                </a:lnTo>
+                <a:lnTo>
+                  <a:pt x="363922" y="25175"/>
+                </a:lnTo>
+                <a:lnTo>
+                  <a:pt x="394248" y="27950"/>
+                </a:lnTo>
+                <a:lnTo>
+                  <a:pt x="424575" y="30853"/>
+                </a:lnTo>
+                <a:lnTo>
+                  <a:pt x="454902" y="33887"/>
+                </a:lnTo>
+                <a:lnTo>
+                  <a:pt x="485229" y="37060"/>
+                </a:lnTo>
+                <a:lnTo>
+                  <a:pt x="515556" y="40376"/>
+                </a:lnTo>
+                <a:lnTo>
+                  <a:pt x="545883" y="43843"/>
+                </a:lnTo>
+                <a:lnTo>
+                  <a:pt x="576209" y="47466"/>
+                </a:lnTo>
+                <a:lnTo>
+                  <a:pt x="606536" y="51253"/>
+                </a:lnTo>
+                <a:lnTo>
+                  <a:pt x="636863" y="55210"/>
+                </a:lnTo>
+                <a:lnTo>
+                  <a:pt x="667190" y="59345"/>
+                </a:lnTo>
+                <a:lnTo>
+                  <a:pt x="697517" y="63664"/>
+                </a:lnTo>
+                <a:lnTo>
+                  <a:pt x="727844" y="68177"/>
+                </a:lnTo>
+                <a:lnTo>
+                  <a:pt x="758170" y="72890"/>
+                </a:lnTo>
+                <a:lnTo>
+                  <a:pt x="788497" y="77813"/>
+                </a:lnTo>
+                <a:lnTo>
+                  <a:pt x="818824" y="82954"/>
+                </a:lnTo>
+                <a:lnTo>
+                  <a:pt x="849151" y="88321"/>
+                </a:lnTo>
+                <a:lnTo>
+                  <a:pt x="879478" y="93924"/>
+                </a:lnTo>
+                <a:lnTo>
+                  <a:pt x="909805" y="99773"/>
+                </a:lnTo>
+                <a:lnTo>
+                  <a:pt x="940131" y="105876"/>
+                </a:lnTo>
+                <a:lnTo>
+                  <a:pt x="970458" y="112246"/>
+                </a:lnTo>
+                <a:lnTo>
+                  <a:pt x="1000785" y="118890"/>
+                </a:lnTo>
+                <a:lnTo>
+                  <a:pt x="1031112" y="125822"/>
+                </a:lnTo>
+                <a:lnTo>
+                  <a:pt x="1061439" y="133051"/>
+                </a:lnTo>
+                <a:lnTo>
+                  <a:pt x="1091766" y="140588"/>
+                </a:lnTo>
+                <a:lnTo>
+                  <a:pt x="1122092" y="148446"/>
+                </a:lnTo>
+                <a:lnTo>
+                  <a:pt x="1152419" y="156637"/>
+                </a:lnTo>
+                <a:lnTo>
+                  <a:pt x="1182746" y="165171"/>
+                </a:lnTo>
+                <a:lnTo>
+                  <a:pt x="1213073" y="174063"/>
+                </a:lnTo>
+                <a:lnTo>
+                  <a:pt x="1243400" y="183325"/>
+                </a:lnTo>
+                <a:lnTo>
+                  <a:pt x="1273727" y="192969"/>
+                </a:lnTo>
+                <a:lnTo>
+                  <a:pt x="1304053" y="203009"/>
+                </a:lnTo>
+                <a:lnTo>
+                  <a:pt x="1334380" y="213459"/>
+                </a:lnTo>
+                <a:lnTo>
+                  <a:pt x="1364707" y="224332"/>
+                </a:lnTo>
+                <a:lnTo>
+                  <a:pt x="1395034" y="235642"/>
+                </a:lnTo>
+                <a:lnTo>
+                  <a:pt x="1425361" y="247403"/>
+                </a:lnTo>
+                <a:lnTo>
+                  <a:pt x="1455688" y="259629"/>
+                </a:lnTo>
+                <a:lnTo>
+                  <a:pt x="1486014" y="272334"/>
+                </a:lnTo>
+                <a:lnTo>
+                  <a:pt x="1516341" y="285533"/>
+                </a:lnTo>
+                <a:lnTo>
+                  <a:pt x="1546668" y="299240"/>
+                </a:lnTo>
+                <a:lnTo>
+                  <a:pt x="1576995" y="313470"/>
+                </a:lnTo>
+                <a:lnTo>
+                  <a:pt x="1607322" y="328237"/>
+                </a:lnTo>
+                <a:lnTo>
+                  <a:pt x="1637649" y="343555"/>
+                </a:lnTo>
+                <a:lnTo>
+                  <a:pt x="1667975" y="359438"/>
+                </a:lnTo>
+                <a:lnTo>
+                  <a:pt x="1698302" y="375900"/>
+                </a:lnTo>
+                <a:lnTo>
+                  <a:pt x="1728629" y="392955"/>
+                </a:lnTo>
+                <a:lnTo>
+                  <a:pt x="1758956" y="410617"/>
+                </a:lnTo>
+                <a:lnTo>
+                  <a:pt x="1789283" y="428897"/>
+                </a:lnTo>
+                <a:lnTo>
+                  <a:pt x="1819610" y="447809"/>
+                </a:lnTo>
+                <a:lnTo>
+                  <a:pt x="1849936" y="467364"/>
+                </a:lnTo>
+                <a:lnTo>
+                  <a:pt x="1880263" y="487574"/>
+                </a:lnTo>
+                <a:lnTo>
+                  <a:pt x="1910590" y="508450"/>
+                </a:lnTo>
+                <a:lnTo>
+                  <a:pt x="1940917" y="530002"/>
+                </a:lnTo>
+                <a:lnTo>
+                  <a:pt x="1971244" y="552238"/>
+                </a:lnTo>
+                <a:lnTo>
+                  <a:pt x="2001571" y="575168"/>
+                </a:lnTo>
+                <a:lnTo>
+                  <a:pt x="2031897" y="598797"/>
+                </a:lnTo>
+                <a:lnTo>
+                  <a:pt x="2062224" y="623133"/>
+                </a:lnTo>
+                <a:lnTo>
+                  <a:pt x="2092551" y="648180"/>
+                </a:lnTo>
+                <a:lnTo>
+                  <a:pt x="2122878" y="673942"/>
+                </a:lnTo>
+                <a:lnTo>
+                  <a:pt x="2153205" y="700421"/>
+                </a:lnTo>
+                <a:lnTo>
+                  <a:pt x="2183532" y="727618"/>
+                </a:lnTo>
+                <a:lnTo>
+                  <a:pt x="2213858" y="755532"/>
+                </a:lnTo>
+                <a:lnTo>
+                  <a:pt x="2244185" y="784161"/>
+                </a:lnTo>
+                <a:lnTo>
+                  <a:pt x="2274512" y="813501"/>
+                </a:lnTo>
+                <a:lnTo>
+                  <a:pt x="2304839" y="843545"/>
+                </a:lnTo>
+                <a:lnTo>
+                  <a:pt x="2335166" y="874288"/>
+                </a:lnTo>
+                <a:lnTo>
+                  <a:pt x="2365493" y="905718"/>
+                </a:lnTo>
+                <a:lnTo>
+                  <a:pt x="2395819" y="937824"/>
+                </a:lnTo>
+                <a:lnTo>
+                  <a:pt x="2426146" y="970594"/>
+                </a:lnTo>
+                <a:lnTo>
+                  <a:pt x="2456473" y="1004012"/>
+                </a:lnTo>
+                <a:lnTo>
+                  <a:pt x="2486800" y="1038059"/>
+                </a:lnTo>
+                <a:lnTo>
+                  <a:pt x="2517127" y="1072718"/>
+                </a:lnTo>
+                <a:lnTo>
+                  <a:pt x="2547454" y="1107965"/>
+                </a:lnTo>
+                <a:lnTo>
+                  <a:pt x="2577780" y="1143779"/>
+                </a:lnTo>
+                <a:lnTo>
+                  <a:pt x="2608107" y="1180132"/>
+                </a:lnTo>
+                <a:lnTo>
+                  <a:pt x="2638434" y="1216998"/>
+                </a:lnTo>
+                <a:lnTo>
+                  <a:pt x="2668761" y="1254348"/>
+                </a:lnTo>
+                <a:lnTo>
+                  <a:pt x="2699088" y="1292149"/>
+                </a:lnTo>
+                <a:lnTo>
+                  <a:pt x="2729415" y="1330370"/>
+                </a:lnTo>
+                <a:lnTo>
+                  <a:pt x="2759741" y="1368976"/>
+                </a:lnTo>
+                <a:lnTo>
+                  <a:pt x="2790068" y="1407930"/>
+                </a:lnTo>
+                <a:lnTo>
+                  <a:pt x="2820395" y="1447195"/>
+                </a:lnTo>
+                <a:lnTo>
+                  <a:pt x="2850722" y="1486732"/>
+                </a:lnTo>
+                <a:lnTo>
+                  <a:pt x="2881049" y="1526501"/>
+                </a:lnTo>
+                <a:lnTo>
+                  <a:pt x="2911376" y="1566462"/>
+                </a:lnTo>
+                <a:lnTo>
+                  <a:pt x="2941702" y="1606573"/>
+                </a:lnTo>
+                <a:lnTo>
+                  <a:pt x="2972029" y="1646791"/>
+                </a:lnTo>
+                <a:lnTo>
+                  <a:pt x="3002356" y="1687073"/>
+                </a:lnTo>
+                <a:lnTo>
+                  <a:pt x="3032683" y="1727377"/>
+                </a:lnTo>
+                <a:lnTo>
+                  <a:pt x="3063010" y="1767660"/>
+                </a:lnTo>
+                <a:lnTo>
+                  <a:pt x="3093337" y="1807878"/>
+                </a:lnTo>
+                <a:lnTo>
+                  <a:pt x="3123663" y="1847988"/>
+                </a:lnTo>
+                <a:lnTo>
+                  <a:pt x="3153990" y="1887949"/>
+                </a:lnTo>
+                <a:lnTo>
+                  <a:pt x="3184317" y="1927719"/>
+                </a:lnTo>
+                <a:lnTo>
+                  <a:pt x="3214644" y="1967256"/>
+                </a:lnTo>
+                <a:lnTo>
+                  <a:pt x="3244971" y="2006521"/>
+                </a:lnTo>
+                <a:lnTo>
+                  <a:pt x="3275298" y="2045475"/>
+                </a:lnTo>
+                <a:lnTo>
+                  <a:pt x="3305624" y="2084080"/>
+                </a:lnTo>
+                <a:lnTo>
+                  <a:pt x="3335951" y="2122301"/>
+                </a:lnTo>
+                <a:lnTo>
+                  <a:pt x="3366278" y="2160103"/>
+                </a:lnTo>
+                <a:lnTo>
+                  <a:pt x="3396605" y="2197452"/>
+                </a:lnTo>
+                <a:lnTo>
+                  <a:pt x="3426932" y="2234318"/>
+                </a:lnTo>
+                <a:lnTo>
+                  <a:pt x="3457259" y="2270672"/>
+                </a:lnTo>
+                <a:lnTo>
+                  <a:pt x="3487585" y="2306485"/>
+                </a:lnTo>
+                <a:lnTo>
+                  <a:pt x="3517912" y="2341733"/>
+                </a:lnTo>
+                <a:lnTo>
+                  <a:pt x="3548239" y="2376391"/>
+                </a:lnTo>
+                <a:lnTo>
+                  <a:pt x="3578566" y="2410439"/>
+                </a:lnTo>
+                <a:lnTo>
+                  <a:pt x="3608893" y="2443856"/>
+                </a:lnTo>
+                <a:lnTo>
+                  <a:pt x="3639220" y="2476626"/>
+                </a:lnTo>
+                <a:lnTo>
+                  <a:pt x="3669546" y="2508733"/>
+                </a:lnTo>
+                <a:lnTo>
+                  <a:pt x="3699873" y="2540163"/>
+                </a:lnTo>
+                <a:lnTo>
+                  <a:pt x="3730200" y="2570905"/>
+                </a:lnTo>
+                <a:lnTo>
+                  <a:pt x="3760527" y="2600950"/>
+                </a:lnTo>
+                <a:lnTo>
+                  <a:pt x="3790854" y="2630289"/>
+                </a:lnTo>
+                <a:lnTo>
+                  <a:pt x="3821181" y="2658918"/>
+                </a:lnTo>
+                <a:lnTo>
+                  <a:pt x="3851507" y="2686832"/>
+                </a:lnTo>
+                <a:lnTo>
+                  <a:pt x="3881834" y="2714029"/>
+                </a:lnTo>
+                <a:lnTo>
+                  <a:pt x="3912161" y="2740508"/>
+                </a:lnTo>
+                <a:lnTo>
+                  <a:pt x="3942488" y="2766270"/>
+                </a:lnTo>
+                <a:lnTo>
+                  <a:pt x="3972815" y="2791317"/>
+                </a:lnTo>
+                <a:lnTo>
+                  <a:pt x="4003142" y="2815653"/>
+                </a:lnTo>
+                <a:lnTo>
+                  <a:pt x="4033468" y="2839283"/>
+                </a:lnTo>
+                <a:lnTo>
+                  <a:pt x="4063795" y="2862212"/>
+                </a:lnTo>
+                <a:lnTo>
+                  <a:pt x="4094122" y="2884449"/>
+                </a:lnTo>
+                <a:lnTo>
+                  <a:pt x="4124449" y="2906000"/>
+                </a:lnTo>
+                <a:lnTo>
+                  <a:pt x="4154776" y="2926876"/>
+                </a:lnTo>
+                <a:lnTo>
+                  <a:pt x="4185103" y="2947087"/>
+                </a:lnTo>
+                <a:lnTo>
+                  <a:pt x="4215429" y="2966642"/>
+                </a:lnTo>
+                <a:lnTo>
+                  <a:pt x="4245756" y="2985554"/>
+                </a:lnTo>
+                <a:lnTo>
+                  <a:pt x="4276083" y="3003834"/>
+                </a:lnTo>
+                <a:lnTo>
+                  <a:pt x="4306410" y="3021495"/>
+                </a:lnTo>
+                <a:lnTo>
+                  <a:pt x="4336737" y="3038550"/>
+                </a:lnTo>
+                <a:lnTo>
+                  <a:pt x="4367064" y="3055012"/>
+                </a:lnTo>
+                <a:lnTo>
+                  <a:pt x="4397390" y="3070895"/>
+                </a:lnTo>
+                <a:lnTo>
+                  <a:pt x="4427717" y="3086213"/>
+                </a:lnTo>
+                <a:lnTo>
+                  <a:pt x="4458044" y="3100980"/>
+                </a:lnTo>
+                <a:lnTo>
+                  <a:pt x="4488371" y="3115210"/>
+                </a:lnTo>
+                <a:lnTo>
+                  <a:pt x="4518698" y="3128917"/>
+                </a:lnTo>
+                <a:lnTo>
+                  <a:pt x="4549025" y="3142116"/>
+                </a:lnTo>
+                <a:lnTo>
+                  <a:pt x="4579351" y="3154822"/>
+                </a:lnTo>
+                <a:lnTo>
+                  <a:pt x="4609678" y="3167048"/>
+                </a:lnTo>
+                <a:lnTo>
+                  <a:pt x="4640005" y="3178809"/>
+                </a:lnTo>
+                <a:lnTo>
+                  <a:pt x="4670332" y="3190119"/>
+                </a:lnTo>
+                <a:lnTo>
+                  <a:pt x="4700659" y="3200991"/>
+                </a:lnTo>
+                <a:lnTo>
+                  <a:pt x="4730986" y="3211441"/>
+                </a:lnTo>
+                <a:lnTo>
+                  <a:pt x="4761312" y="3221481"/>
+                </a:lnTo>
+                <a:lnTo>
+                  <a:pt x="4791639" y="3231126"/>
+                </a:lnTo>
+                <a:lnTo>
+                  <a:pt x="4821966" y="3240387"/>
+                </a:lnTo>
+                <a:lnTo>
+                  <a:pt x="4852293" y="3249279"/>
+                </a:lnTo>
+                <a:lnTo>
+                  <a:pt x="4882620" y="3257814"/>
+                </a:lnTo>
+                <a:lnTo>
+                  <a:pt x="4912947" y="3266004"/>
+                </a:lnTo>
+                <a:lnTo>
+                  <a:pt x="4943273" y="3273862"/>
+                </a:lnTo>
+                <a:lnTo>
+                  <a:pt x="4973600" y="3281400"/>
+                </a:lnTo>
+                <a:lnTo>
+                  <a:pt x="5003927" y="3288629"/>
+                </a:lnTo>
+                <a:lnTo>
+                  <a:pt x="5034254" y="3295560"/>
+                </a:lnTo>
+                <a:lnTo>
+                  <a:pt x="5064581" y="3302205"/>
+                </a:lnTo>
+                <a:lnTo>
+                  <a:pt x="5094908" y="3308574"/>
+                </a:lnTo>
+                <a:lnTo>
+                  <a:pt x="5125234" y="3314678"/>
+                </a:lnTo>
+                <a:lnTo>
+                  <a:pt x="5155561" y="3320526"/>
+                </a:lnTo>
+                <a:lnTo>
+                  <a:pt x="5185888" y="3326130"/>
+                </a:lnTo>
+                <a:lnTo>
+                  <a:pt x="5216215" y="3331497"/>
+                </a:lnTo>
+                <a:lnTo>
+                  <a:pt x="5246542" y="3336637"/>
+                </a:lnTo>
+                <a:lnTo>
+                  <a:pt x="5276869" y="3341560"/>
+                </a:lnTo>
+                <a:lnTo>
+                  <a:pt x="5307195" y="3346273"/>
+                </a:lnTo>
+                <a:lnTo>
+                  <a:pt x="5337522" y="3350786"/>
+                </a:lnTo>
+                <a:lnTo>
+                  <a:pt x="5367849" y="3355106"/>
+                </a:lnTo>
+                <a:lnTo>
+                  <a:pt x="5398176" y="3359240"/>
+                </a:lnTo>
+                <a:lnTo>
+                  <a:pt x="5428503" y="3363198"/>
+                </a:lnTo>
+                <a:lnTo>
+                  <a:pt x="5458830" y="3366984"/>
+                </a:lnTo>
+                <a:lnTo>
+                  <a:pt x="5489156" y="3370608"/>
+                </a:lnTo>
+                <a:lnTo>
+                  <a:pt x="5519483" y="3374074"/>
+                </a:lnTo>
+                <a:lnTo>
+                  <a:pt x="5549810" y="3377391"/>
+                </a:lnTo>
+                <a:lnTo>
+                  <a:pt x="5580137" y="3380563"/>
+                </a:lnTo>
+                <a:lnTo>
+                  <a:pt x="5610464" y="3383598"/>
+                </a:lnTo>
+                <a:lnTo>
+                  <a:pt x="5640791" y="3386500"/>
+                </a:lnTo>
+                <a:lnTo>
+                  <a:pt x="5671117" y="3389276"/>
+                </a:lnTo>
+                <a:lnTo>
+                  <a:pt x="5701444" y="3391930"/>
+                </a:lnTo>
+                <a:lnTo>
+                  <a:pt x="5731771" y="3394468"/>
+                </a:lnTo>
+                <a:lnTo>
+                  <a:pt x="5762098" y="3396895"/>
+                </a:lnTo>
+                <a:lnTo>
+                  <a:pt x="5792425" y="3399215"/>
+                </a:lnTo>
+                <a:lnTo>
+                  <a:pt x="5822752" y="3401434"/>
+                </a:lnTo>
+                <a:lnTo>
+                  <a:pt x="5853078" y="3403554"/>
+                </a:lnTo>
+                <a:lnTo>
+                  <a:pt x="5883405" y="3405581"/>
+                </a:lnTo>
+                <a:lnTo>
+                  <a:pt x="5913732" y="3407519"/>
+                </a:lnTo>
+                <a:lnTo>
+                  <a:pt x="5944059" y="3409371"/>
+                </a:lnTo>
+                <a:lnTo>
+                  <a:pt x="5974386" y="3411141"/>
+                </a:lnTo>
+                <a:lnTo>
+                  <a:pt x="6004713" y="3412833"/>
+                </a:lnTo>
+                <a:lnTo>
+                  <a:pt x="6035040" y="3414450"/>
+                </a:lnTo>
+              </a:path>
+            </a:pathLst>
+          </a:custGeom>
+          <a:noFill/>
+          <a:ln w="38100">
+            <a:solidFill>
+              <a:srgbClr val="F2B880"/>
+            </a:solidFill>
+            <a:prstDash val="dash"/>
+          </a:ln>
+          <a:effectLst/>
+        </p:spPr>
+        <p:txBody>
+          <a:bodyPr rtlCol="0" anchor="ctr"/>
+          <a:lstStyle/>
+          <a:p>
+            <a:pPr algn="ctr"/>
+          </a:p>
+        </p:txBody>
+      </p:sp>
+      <p:cxnSp>
+        <p:nvCxnSpPr>
+          <p:cNvPr id="37" name="C3-E24 line 35" descr="sci-ppt:o035"/>
+          <p:cNvCxnSpPr/>
+          <p:nvPr/>
+        </p:nvCxnSpPr>
+        <p:spPr>
+          <a:xfrm>
+            <a:off x="3931920" y="1371600"/>
+            <a:ext cx="0" cy="3657600"/>
+          </a:xfrm>
+          <a:prstGeom prst="line">
+            <a:avLst/>
+          </a:prstGeom>
+          <a:ln w="16510">
+            <a:solidFill>
+              <a:srgbClr val="B4C7D2"/>
+            </a:solidFill>
+            <a:prstDash val="dash"/>
+          </a:ln>
+          <a:effectLst/>
+        </p:spPr>
+      </p:cxnSp>
+      <p:sp>
+        <p:nvSpPr>
+          <p:cNvPr id="38" name="C3-E24 ellipse 36" descr="sci-ppt:o036"/>
+          <p:cNvSpPr/>
+          <p:nvPr/>
+        </p:nvSpPr>
+        <p:spPr>
+          <a:xfrm>
+            <a:off x="3858768" y="3214333"/>
+            <a:ext cx="146304" cy="146304"/>
+          </a:xfrm>
+          <a:prstGeom prst="ellipse">
+            <a:avLst/>
+          </a:prstGeom>
+          <a:solidFill>
+            <a:srgbClr val="E7F0F3"/>
+          </a:solidFill>
+          <a:ln w="12700">
+            <a:solidFill>
+              <a:srgbClr val="E7F0F3"/>
+            </a:solidFill>
+          </a:ln>
+          <a:effectLst/>
+        </p:spPr>
+        <p:txBody>
+          <a:bodyPr rtlCol="0" anchor="ctr"/>
+          <a:lstStyle/>
+          <a:p>
+            <a:pPr algn="ctr"/>
+          </a:p>
+        </p:txBody>
+      </p:sp>
+      <p:sp>
+        <p:nvSpPr>
+          <p:cNvPr id="39" name="C3-E24 text 37" descr="sci-ppt:o037"/>
+          <p:cNvSpPr txBox="1"/>
+          <p:nvPr/>
+        </p:nvSpPr>
+        <p:spPr>
+          <a:xfrm>
+            <a:off x="4041648" y="3424645"/>
+            <a:ext cx="1645920" cy="223900"/>
+          </a:xfrm>
+          <a:prstGeom prst="rect">
+            <a:avLst/>
+          </a:prstGeom>
+          <a:noFill/>
+          <a:effectLst/>
+        </p:spPr>
+        <p:txBody>
+          <a:bodyPr wrap="none" lIns="18288" rIns="18288" tIns="18288" bIns="18288" anchor="t">
+            <a:spAutoFit/>
+          </a:bodyPr>
+          <a:lstStyle/>
+          <a:p>
+            <a:pPr algn="l">
+              <a:spcAft>
+                <a:spcPts val="0"/>
+              </a:spcAft>
+            </a:pPr>
+            <a:r>
+              <a:rPr sz="1150" b="0" i="0">
+                <a:solidFill>
+                  <a:srgbClr val="E7F0F3"/>
+                </a:solidFill>
+                <a:latin typeface="Arial"/>
+              </a:rPr>
+              <a:t>matched: both 1/2</a:t>
+            </a:r>
+          </a:p>
+        </p:txBody>
+      </p:sp>
+      <p:sp>
+        <p:nvSpPr>
+          <p:cNvPr id="40" name="C3-E24 text 38" descr="sci-ppt:o038"/>
+          <p:cNvSpPr txBox="1"/>
+          <p:nvPr/>
+        </p:nvSpPr>
+        <p:spPr>
+          <a:xfrm>
+            <a:off x="1107017" y="4430485"/>
+            <a:ext cx="1645920" cy="402081"/>
+          </a:xfrm>
+          <a:prstGeom prst="rect">
+            <a:avLst/>
+          </a:prstGeom>
+          <a:noFill/>
+          <a:effectLst/>
+        </p:spPr>
+        <p:txBody>
+          <a:bodyPr wrap="none" lIns="18288" rIns="18288" tIns="18288" bIns="18288" anchor="t">
             <a:spAutoFit/>
           </a:bodyPr>
           <a:lstStyle/>
@@ -3653,33 +5445,9 @@
                 </a:solidFill>
                 <a:latin typeface="Arial"/>
               </a:rPr>
-              <a:t>• U_j incoming liquid</a:t>
-            </a:r>
-          </a:p>
-        </p:txBody>
-      </p:sp>
-      <p:sp>
-        <p:nvSpPr>
-          <p:cNvPr id="19" name="C3-E24 text 17" descr="sci-ppt:o017"/>
-          <p:cNvSpPr txBox="1"/>
-          <p:nvPr/>
-        </p:nvSpPr>
-        <p:spPr>
-          <a:xfrm>
-            <a:off x="6217920" y="4096512"/>
-            <a:ext cx="5715000" cy="246888"/>
-          </a:xfrm>
-          <a:prstGeom prst="rect">
-            <a:avLst/>
-          </a:prstGeom>
-          <a:noFill/>
-          <a:effectLst/>
-        </p:spPr>
-        <p:txBody>
-          <a:bodyPr wrap="square" lIns="27432" rIns="27432" tIns="18288" bIns="18288" anchor="ctr">
-            <a:spAutoFit/>
-          </a:bodyPr>
-          <a:lstStyle/>
+              <a:t>free surface:</a:t>
+            </a:r>
+          </a:p>
           <a:p>
             <a:pPr algn="l">
               <a:spcAft>
@@ -3693,21 +5461,21 @@
                 </a:solidFill>
                 <a:latin typeface="Arial"/>
               </a:rPr>
-              <a:t>• v_i common interface velocity</a:t>
-            </a:r>
-          </a:p>
-        </p:txBody>
-      </p:sp>
-      <p:sp>
-        <p:nvSpPr>
-          <p:cNvPr id="20" name="C3-E24 text 18" descr="sci-ppt:o018"/>
+              <a:t>p_early → 0</a:t>
+            </a:r>
+          </a:p>
+        </p:txBody>
+      </p:sp>
+      <p:sp>
+        <p:nvSpPr>
+          <p:cNvPr id="41" name="C3-E24 text 39" descr="sci-ppt:o039"/>
           <p:cNvSpPr txBox="1"/>
           <p:nvPr/>
         </p:nvSpPr>
         <p:spPr>
           <a:xfrm>
-            <a:off x="320040" y="4329684"/>
-            <a:ext cx="5715000" cy="246888"/>
+            <a:off x="3974622" y="1881051"/>
+            <a:ext cx="1828800" cy="402081"/>
           </a:xfrm>
           <a:prstGeom prst="rect">
             <a:avLst/>
@@ -3716,7 +5484,7 @@
           <a:effectLst/>
         </p:spPr>
         <p:txBody>
-          <a:bodyPr wrap="square" lIns="27432" rIns="27432" tIns="18288" bIns="18288" anchor="ctr">
+          <a:bodyPr wrap="none" lIns="18288" rIns="18288" tIns="18288" bIns="18288" anchor="t">
             <a:spAutoFit/>
           </a:bodyPr>
           <a:lstStyle/>
@@ -3733,33 +5501,9 @@
                 </a:solidFill>
                 <a:latin typeface="Arial"/>
               </a:rPr>
-              <a:t>• p_early compressive contact pressure</a:t>
-            </a:r>
-          </a:p>
-        </p:txBody>
-      </p:sp>
-      <p:sp>
-        <p:nvSpPr>
-          <p:cNvPr id="21" name="C3-E24 text 19" descr="sci-ppt:o019"/>
-          <p:cNvSpPr txBox="1"/>
-          <p:nvPr/>
-        </p:nvSpPr>
-        <p:spPr>
-          <a:xfrm>
-            <a:off x="6217920" y="4329684"/>
-            <a:ext cx="5715000" cy="246888"/>
-          </a:xfrm>
-          <a:prstGeom prst="rect">
-            <a:avLst/>
-          </a:prstGeom>
-          <a:noFill/>
-          <a:effectLst/>
-        </p:spPr>
-        <p:txBody>
-          <a:bodyPr wrap="square" lIns="27432" rIns="27432" tIns="18288" bIns="18288" anchor="ctr">
-            <a:spAutoFit/>
-          </a:bodyPr>
-          <a:lstStyle/>
+              <a:t>rigid receiver:</a:t>
+            </a:r>
+          </a:p>
           <a:p>
             <a:pPr algn="l">
               <a:spcAft>
@@ -3773,21 +5517,53 @@
                 </a:solidFill>
                 <a:latin typeface="Arial"/>
               </a:rPr>
-              <a:t>• Z_l = ρc liquid side</a:t>
-            </a:r>
-          </a:p>
-        </p:txBody>
-      </p:sp>
-      <p:sp>
-        <p:nvSpPr>
-          <p:cNvPr id="22" name="C3-E24 text 20" descr="sci-ppt:o020"/>
+              <a:t>p_early → ρ c Uⱼ</a:t>
+            </a:r>
+          </a:p>
+        </p:txBody>
+      </p:sp>
+      <p:sp>
+        <p:nvSpPr>
+          <p:cNvPr id="42" name="C3-E24 round_rect 40" descr="sci-ppt:o040"/>
+          <p:cNvSpPr/>
+          <p:nvPr/>
+        </p:nvSpPr>
+        <p:spPr>
+          <a:xfrm>
+            <a:off x="7223760" y="1371600"/>
+            <a:ext cx="4617720" cy="3657600"/>
+          </a:xfrm>
+          <a:prstGeom prst="roundRect">
+            <a:avLst/>
+          </a:prstGeom>
+          <a:solidFill>
+            <a:srgbClr val="213E4B"/>
+          </a:solidFill>
+          <a:ln w="20320">
+            <a:solidFill>
+              <a:srgbClr val="8EDBD4"/>
+            </a:solidFill>
+          </a:ln>
+          <a:effectLst/>
+        </p:spPr>
+        <p:txBody>
+          <a:bodyPr rtlCol="0" anchor="ctr"/>
+          <a:lstStyle/>
+          <a:p>
+            <a:pPr algn="ctr"/>
+          </a:p>
+        </p:txBody>
+      </p:sp>
+      <p:sp>
+        <p:nvSpPr>
+          <p:cNvPr id="43" name="C3-E24 text 41" descr="sci-ppt:o041"/>
           <p:cNvSpPr txBox="1"/>
           <p:nvPr/>
         </p:nvSpPr>
         <p:spPr>
           <a:xfrm>
-            <a:off x="320040" y="4562856"/>
-            <a:ext cx="5715000" cy="246888"/>
+            <a:off x="7333488" y="1426464"/>
+            <a:ext cx="4398264" cy="254889"/>
           </a:xfrm>
           <a:prstGeom prst="rect">
             <a:avLst/>
@@ -3796,7 +5572,7 @@
           <a:effectLst/>
         </p:spPr>
         <p:txBody>
-          <a:bodyPr wrap="square" lIns="27432" rIns="27432" tIns="18288" bIns="18288" anchor="ctr">
+          <a:bodyPr wrap="none" lIns="18288" rIns="18288" tIns="18288" bIns="18288" anchor="t">
             <a:spAutoFit/>
           </a:bodyPr>
           <a:lstStyle/>
@@ -3807,27 +5583,243 @@
               </a:spcAft>
             </a:pPr>
             <a:r>
-              <a:rPr sz="1150" b="0" i="0">
+              <a:rPr sz="1350" b="1" i="0">
+                <a:solidFill>
+                  <a:srgbClr val="8EDBD4"/>
+                </a:solidFill>
+                <a:latin typeface="Arial"/>
+              </a:rPr>
+              <a:t>Contact matching</a:t>
+            </a:r>
+          </a:p>
+        </p:txBody>
+      </p:sp>
+      <p:sp>
+        <p:nvSpPr>
+          <p:cNvPr id="44" name="C3-E24 text 42" descr="sci-ppt:o042"/>
+          <p:cNvSpPr txBox="1"/>
+          <p:nvPr/>
+        </p:nvSpPr>
+        <p:spPr>
+          <a:xfrm>
+            <a:off x="7360920" y="1828800"/>
+            <a:ext cx="4389120" cy="231648"/>
+          </a:xfrm>
+          <a:prstGeom prst="rect">
+            <a:avLst/>
+          </a:prstGeom>
+          <a:noFill/>
+          <a:effectLst/>
+        </p:spPr>
+        <p:txBody>
+          <a:bodyPr wrap="none" lIns="18288" rIns="18288" tIns="18288" bIns="18288" anchor="t">
+            <a:spAutoFit/>
+          </a:bodyPr>
+          <a:lstStyle/>
+          <a:p>
+            <a:pPr algn="l">
+              <a:spcAft>
+                <a:spcPts val="0"/>
+              </a:spcAft>
+            </a:pPr>
+            <a:r>
+              <a:rPr sz="1200" b="1" i="0">
+                <a:solidFill>
+                  <a:srgbClr val="E7F0F3"/>
+                </a:solidFill>
+                <a:latin typeface="Arial"/>
+              </a:rPr>
+              <a:t>(∂ₜ ± c∂_z)(u ± p′/Zₗ) = 0  (characteristics)</a:t>
+            </a:r>
+          </a:p>
+        </p:txBody>
+      </p:sp>
+      <p:sp>
+        <p:nvSpPr>
+          <p:cNvPr id="45" name="C3-E24 text 43" descr="sci-ppt:o043"/>
+          <p:cNvSpPr txBox="1"/>
+          <p:nvPr/>
+        </p:nvSpPr>
+        <p:spPr>
+          <a:xfrm>
+            <a:off x="7360920" y="2331720"/>
+            <a:ext cx="4389120" cy="239395"/>
+          </a:xfrm>
+          <a:prstGeom prst="rect">
+            <a:avLst/>
+          </a:prstGeom>
+          <a:noFill/>
+          <a:effectLst/>
+        </p:spPr>
+        <p:txBody>
+          <a:bodyPr wrap="none" lIns="18288" rIns="18288" tIns="18288" bIns="18288" anchor="t">
+            <a:spAutoFit/>
+          </a:bodyPr>
+          <a:lstStyle/>
+          <a:p>
+            <a:pPr algn="l">
+              <a:spcAft>
+                <a:spcPts val="0"/>
+              </a:spcAft>
+            </a:pPr>
+            <a:r>
+              <a:rPr sz="1250" b="1" i="0">
+                <a:solidFill>
+                  <a:srgbClr val="F2B880"/>
+                </a:solidFill>
+                <a:latin typeface="Arial"/>
+              </a:rPr>
+              <a:t>p_early = Zₗ(Uⱼ − vᵢ) = Zᵣ vᵢ</a:t>
+            </a:r>
+          </a:p>
+        </p:txBody>
+      </p:sp>
+      <p:sp>
+        <p:nvSpPr>
+          <p:cNvPr id="46" name="C3-E24 text 44" descr="sci-ppt:o044"/>
+          <p:cNvSpPr txBox="1"/>
+          <p:nvPr/>
+        </p:nvSpPr>
+        <p:spPr>
+          <a:xfrm>
+            <a:off x="7360920" y="2834640"/>
+            <a:ext cx="4389120" cy="239395"/>
+          </a:xfrm>
+          <a:prstGeom prst="rect">
+            <a:avLst/>
+          </a:prstGeom>
+          <a:noFill/>
+          <a:effectLst/>
+        </p:spPr>
+        <p:txBody>
+          <a:bodyPr wrap="none" lIns="18288" rIns="18288" tIns="18288" bIns="18288" anchor="t">
+            <a:spAutoFit/>
+          </a:bodyPr>
+          <a:lstStyle/>
+          <a:p>
+            <a:pPr algn="l">
+              <a:spcAft>
+                <a:spcPts val="0"/>
+              </a:spcAft>
+            </a:pPr>
+            <a:r>
+              <a:rPr sz="1250" b="1" i="0">
+                <a:solidFill>
+                  <a:srgbClr val="F2B880"/>
+                </a:solidFill>
+                <a:latin typeface="Arial"/>
+              </a:rPr>
+              <a:t>vᵢ = Zₗ Uⱼ / (Zₗ + Zᵣ)  (dashed)</a:t>
+            </a:r>
+          </a:p>
+        </p:txBody>
+      </p:sp>
+      <p:sp>
+        <p:nvSpPr>
+          <p:cNvPr id="47" name="C3-E24 text 45" descr="sci-ppt:o045"/>
+          <p:cNvSpPr txBox="1"/>
+          <p:nvPr/>
+        </p:nvSpPr>
+        <p:spPr>
+          <a:xfrm>
+            <a:off x="7360920" y="3337560"/>
+            <a:ext cx="4389120" cy="239395"/>
+          </a:xfrm>
+          <a:prstGeom prst="rect">
+            <a:avLst/>
+          </a:prstGeom>
+          <a:noFill/>
+          <a:effectLst/>
+        </p:spPr>
+        <p:txBody>
+          <a:bodyPr wrap="none" lIns="18288" rIns="18288" tIns="18288" bIns="18288" anchor="t">
+            <a:spAutoFit/>
+          </a:bodyPr>
+          <a:lstStyle/>
+          <a:p>
+            <a:pPr algn="l">
+              <a:spcAft>
+                <a:spcPts val="0"/>
+              </a:spcAft>
+            </a:pPr>
+            <a:r>
+              <a:rPr sz="1250" b="1" i="0">
+                <a:solidFill>
+                  <a:srgbClr val="8EDBD4"/>
+                </a:solidFill>
+                <a:latin typeface="Arial"/>
+              </a:rPr>
+              <a:t>p_early = Zₗ Zᵣ Uⱼ / (Zₗ + Zᵣ)  (solid)</a:t>
+            </a:r>
+          </a:p>
+        </p:txBody>
+      </p:sp>
+      <p:sp>
+        <p:nvSpPr>
+          <p:cNvPr id="48" name="C3-E24 text 46" descr="sci-ppt:o046"/>
+          <p:cNvSpPr txBox="1"/>
+          <p:nvPr/>
+        </p:nvSpPr>
+        <p:spPr>
+          <a:xfrm>
+            <a:off x="7360920" y="3977639"/>
+            <a:ext cx="4389120" cy="417576"/>
+          </a:xfrm>
+          <a:prstGeom prst="rect">
+            <a:avLst/>
+          </a:prstGeom>
+          <a:noFill/>
+          <a:effectLst/>
+        </p:spPr>
+        <p:txBody>
+          <a:bodyPr wrap="none" lIns="18288" rIns="18288" tIns="18288" bIns="18288" anchor="t">
+            <a:spAutoFit/>
+          </a:bodyPr>
+          <a:lstStyle/>
+          <a:p>
+            <a:pPr algn="l">
+              <a:spcAft>
+                <a:spcPts val="0"/>
+              </a:spcAft>
+            </a:pPr>
+            <a:r>
+              <a:rPr sz="1200" b="0" i="0">
                 <a:solidFill>
                   <a:srgbClr val="B4C7D2"/>
                 </a:solidFill>
                 <a:latin typeface="Arial"/>
               </a:rPr>
-              <a:t>• Z_r receiver side</a:t>
-            </a:r>
-          </a:p>
-        </p:txBody>
-      </p:sp>
-      <p:sp>
-        <p:nvSpPr>
-          <p:cNvPr id="23" name="C3-E24 text 21" descr="sci-ppt:o021"/>
+              <a:t>Equal pressure and equal normal velocity at the</a:t>
+            </a:r>
+          </a:p>
+          <a:p>
+            <a:pPr algn="l">
+              <a:spcAft>
+                <a:spcPts val="0"/>
+              </a:spcAft>
+            </a:pPr>
+            <a:r>
+              <a:rPr sz="1200" b="0" i="0">
+                <a:solidFill>
+                  <a:srgbClr val="B4C7D2"/>
+                </a:solidFill>
+                <a:latin typeface="Arial"/>
+              </a:rPr>
+              <a:t>contact fix both numbers.</a:t>
+            </a:r>
+          </a:p>
+        </p:txBody>
+      </p:sp>
+      <p:sp>
+        <p:nvSpPr>
+          <p:cNvPr id="49" name="C3-E24 text 47" descr="sci-ppt:o047"/>
           <p:cNvSpPr txBox="1"/>
           <p:nvPr/>
         </p:nvSpPr>
         <p:spPr>
           <a:xfrm>
-            <a:off x="6217920" y="4562856"/>
-            <a:ext cx="5715000" cy="246888"/>
+            <a:off x="914400" y="5733288"/>
+            <a:ext cx="10972800" cy="239395"/>
           </a:xfrm>
           <a:prstGeom prst="rect">
             <a:avLst/>
@@ -3836,7 +5828,7 @@
           <a:effectLst/>
         </p:spPr>
         <p:txBody>
-          <a:bodyPr wrap="square" lIns="27432" rIns="27432" tIns="18288" bIns="18288" anchor="ctr">
+          <a:bodyPr wrap="none" lIns="18288" rIns="18288" tIns="18288" bIns="18288" anchor="t">
             <a:spAutoFit/>
           </a:bodyPr>
           <a:lstStyle/>
@@ -3847,27 +5839,27 @@
               </a:spcAft>
             </a:pPr>
             <a:r>
-              <a:rPr sz="1150" b="0" i="0">
+              <a:rPr sz="1250" b="0" i="0">
                 <a:solidFill>
-                  <a:srgbClr val="B4C7D2"/>
+                  <a:srgbClr val="E7F0F3"/>
                 </a:solidFill>
                 <a:latin typeface="Arial"/>
               </a:rPr>
-              <a:t>• u, p′, z, t characteristic fields</a:t>
-            </a:r>
-          </a:p>
-        </p:txBody>
-      </p:sp>
-      <p:sp>
-        <p:nvSpPr>
-          <p:cNvPr id="24" name="C3-E24 text 22" descr="sci-ppt:o022"/>
+              <a:t>Stiffer receivers raise the early pressure toward Zₗ Uⱼ but never above it; softer receivers lower it and let the jet keep moving.</a:t>
+            </a:r>
+          </a:p>
+        </p:txBody>
+      </p:sp>
+      <p:sp>
+        <p:nvSpPr>
+          <p:cNvPr id="50" name="C3-E24 text 48" descr="sci-ppt:o048"/>
           <p:cNvSpPr txBox="1"/>
           <p:nvPr/>
         </p:nvSpPr>
         <p:spPr>
           <a:xfrm>
-            <a:off x="320040" y="4796028"/>
-            <a:ext cx="5715000" cy="246888"/>
+            <a:off x="320040" y="6510528"/>
+            <a:ext cx="11521440" cy="200660"/>
           </a:xfrm>
           <a:prstGeom prst="rect">
             <a:avLst/>
@@ -3876,167 +5868,7 @@
           <a:effectLst/>
         </p:spPr>
         <p:txBody>
-          <a:bodyPr wrap="square" lIns="27432" rIns="27432" tIns="18288" bIns="18288" anchor="ctr">
-            <a:spAutoFit/>
-          </a:bodyPr>
-          <a:lstStyle/>
-          <a:p>
-            <a:pPr algn="l">
-              <a:spcAft>
-                <a:spcPts val="0"/>
-              </a:spcAft>
-            </a:pPr>
-            <a:r>
-              <a:rPr sz="1150" b="0" i="0">
-                <a:solidFill>
-                  <a:srgbClr val="B4C7D2"/>
-                </a:solidFill>
-                <a:latin typeface="Arial"/>
-              </a:rPr>
-              <a:t>• ∂ₜ ± c∂z; c wave speed</a:t>
-            </a:r>
-          </a:p>
-        </p:txBody>
-      </p:sp>
-      <p:sp>
-        <p:nvSpPr>
-          <p:cNvPr id="25" name="C3-E24 text 23" descr="sci-ppt:o023"/>
-          <p:cNvSpPr txBox="1"/>
-          <p:nvPr/>
-        </p:nvSpPr>
-        <p:spPr>
-          <a:xfrm>
-            <a:off x="320040" y="5596128"/>
-            <a:ext cx="11430000" cy="292608"/>
-          </a:xfrm>
-          <a:prstGeom prst="rect">
-            <a:avLst/>
-          </a:prstGeom>
-          <a:noFill/>
-          <a:effectLst/>
-        </p:spPr>
-        <p:txBody>
-          <a:bodyPr wrap="square" lIns="27432" rIns="27432" tIns="18288" bIns="18288" anchor="ctr">
-            <a:spAutoFit/>
-          </a:bodyPr>
-          <a:lstStyle/>
-          <a:p>
-            <a:pPr algn="l">
-              <a:spcAft>
-                <a:spcPts val="0"/>
-              </a:spcAft>
-            </a:pPr>
-            <a:r>
-              <a:rPr sz="1150" b="0" i="0">
-                <a:solidFill>
-                  <a:srgbClr val="8EDBD4"/>
-                </a:solidFill>
-                <a:latin typeface="Arial"/>
-              </a:rPr>
-              <a:t>Liquid deceleration wave travels upstream</a:t>
-            </a:r>
-          </a:p>
-        </p:txBody>
-      </p:sp>
-      <p:sp>
-        <p:nvSpPr>
-          <p:cNvPr id="26" name="C3-E24 text 24" descr="sci-ppt:o024"/>
-          <p:cNvSpPr txBox="1"/>
-          <p:nvPr/>
-        </p:nvSpPr>
-        <p:spPr>
-          <a:xfrm>
-            <a:off x="320040" y="5870448"/>
-            <a:ext cx="11430000" cy="292608"/>
-          </a:xfrm>
-          <a:prstGeom prst="rect">
-            <a:avLst/>
-          </a:prstGeom>
-          <a:noFill/>
-          <a:effectLst/>
-        </p:spPr>
-        <p:txBody>
-          <a:bodyPr wrap="square" lIns="27432" rIns="27432" tIns="18288" bIns="18288" anchor="ctr">
-            <a:spAutoFit/>
-          </a:bodyPr>
-          <a:lstStyle/>
-          <a:p>
-            <a:pPr algn="l">
-              <a:spcAft>
-                <a:spcPts val="0"/>
-              </a:spcAft>
-            </a:pPr>
-            <a:r>
-              <a:rPr sz="1150" b="0" i="0">
-                <a:solidFill>
-                  <a:srgbClr val="8EDBD4"/>
-                </a:solidFill>
-                <a:latin typeface="Arial"/>
-              </a:rPr>
-              <a:t>Receiver wave travels into receiver</a:t>
-            </a:r>
-          </a:p>
-        </p:txBody>
-      </p:sp>
-      <p:sp>
-        <p:nvSpPr>
-          <p:cNvPr id="27" name="C3-E24 text 25" descr="sci-ppt:o025"/>
-          <p:cNvSpPr txBox="1"/>
-          <p:nvPr/>
-        </p:nvSpPr>
-        <p:spPr>
-          <a:xfrm>
-            <a:off x="320040" y="6144768"/>
-            <a:ext cx="11430000" cy="292608"/>
-          </a:xfrm>
-          <a:prstGeom prst="rect">
-            <a:avLst/>
-          </a:prstGeom>
-          <a:noFill/>
-          <a:effectLst/>
-        </p:spPr>
-        <p:txBody>
-          <a:bodyPr wrap="square" lIns="27432" rIns="27432" tIns="18288" bIns="18288" anchor="ctr">
-            <a:spAutoFit/>
-          </a:bodyPr>
-          <a:lstStyle/>
-          <a:p>
-            <a:pPr algn="l">
-              <a:spcAft>
-                <a:spcPts val="0"/>
-              </a:spcAft>
-            </a:pPr>
-            <a:r>
-              <a:rPr sz="1150" b="0" i="0">
-                <a:solidFill>
-                  <a:srgbClr val="8EDBD4"/>
-                </a:solidFill>
-                <a:latin typeface="Arial"/>
-              </a:rPr>
-              <a:t>No pre-existing incident pressure wave is separately added</a:t>
-            </a:r>
-          </a:p>
-        </p:txBody>
-      </p:sp>
-      <p:sp>
-        <p:nvSpPr>
-          <p:cNvPr id="28" name="C3-E24 text 26" descr="sci-ppt:o026"/>
-          <p:cNvSpPr txBox="1"/>
-          <p:nvPr/>
-        </p:nvSpPr>
-        <p:spPr>
-          <a:xfrm>
-            <a:off x="320040" y="6473952"/>
-            <a:ext cx="11430000" cy="256032"/>
-          </a:xfrm>
-          <a:prstGeom prst="rect">
-            <a:avLst/>
-          </a:prstGeom>
-          <a:noFill/>
-          <a:effectLst/>
-        </p:spPr>
-        <p:txBody>
-          <a:bodyPr wrap="square" lIns="27432" rIns="27432" tIns="18288" bIns="18288" anchor="ctr">
+          <a:bodyPr wrap="none" lIns="18288" rIns="18288" tIns="18288" bIns="18288" anchor="t">
             <a:spAutoFit/>
           </a:bodyPr>
           <a:lstStyle/>
@@ -4053,7 +5885,7 @@
                 </a:solidFill>
                 <a:latin typeface="Arial"/>
               </a:rPr>
-              <a:t>Model schematic; geometry is not to scale.</a:t>
+              <a:t>Early contact state of Eq. C3-E24 (Zₗ = ρ c).</a:t>
             </a:r>
           </a:p>
         </p:txBody>
